--- a/assets/figures-editable/c3-c4/c4-e21.pptx
+++ b/assets/figures-editable/c3-c4/c4-e21.pptx
@@ -3104,8 +3104,8 @@
         </p:nvSpPr>
         <p:spPr>
           <a:xfrm>
-            <a:off x="274320" y="137160"/>
-            <a:ext cx="11612880" cy="365760"/>
+            <a:off x="274320" y="118872"/>
+            <a:ext cx="11612880" cy="340105"/>
           </a:xfrm>
           <a:prstGeom prst="rect">
             <a:avLst/>
@@ -3114,7 +3114,7 @@
           <a:effectLst/>
         </p:spPr>
         <p:txBody>
-          <a:bodyPr wrap="square" lIns="27432" rIns="27432" tIns="18288" bIns="18288" anchor="ctr">
+          <a:bodyPr wrap="none" lIns="18288" rIns="18288" tIns="18288" bIns="18288" anchor="t">
             <a:spAutoFit/>
           </a:bodyPr>
           <a:lstStyle/>
@@ -3125,7 +3125,7 @@
               </a:spcAft>
             </a:pPr>
             <a:r>
-              <a:rPr sz="2100" b="0" i="0">
+              <a:rPr sz="1900" b="1" i="0">
                 <a:solidFill>
                   <a:srgbClr val="8EDBD4"/>
                 </a:solidFill>
@@ -3144,13 +3144,13 @@
         </p:nvCxnSpPr>
         <p:spPr>
           <a:xfrm>
-            <a:off x="731520" y="2880360"/>
-            <a:ext cx="6675120" cy="0"/>
+            <a:off x="914400" y="4937760"/>
+            <a:ext cx="5669280" cy="0"/>
           </a:xfrm>
           <a:prstGeom prst="line">
             <a:avLst/>
           </a:prstGeom>
-          <a:ln w="25400">
+          <a:ln w="19050">
             <a:solidFill>
               <a:srgbClr val="B4C7D2"/>
             </a:solidFill>
@@ -3165,16 +3165,16 @@
           <p:nvPr/>
         </p:nvCxnSpPr>
         <p:spPr>
-          <a:xfrm flipV="1">
-            <a:off x="1005840" y="2876570"/>
-            <a:ext cx="76581" cy="3790"/>
+          <a:xfrm>
+            <a:off x="914400" y="1371600"/>
+            <a:ext cx="0" cy="3566160"/>
           </a:xfrm>
           <a:prstGeom prst="line">
             <a:avLst/>
           </a:prstGeom>
-          <a:ln w="25400">
+          <a:ln w="19050">
             <a:solidFill>
-              <a:srgbClr val="8EDBD4"/>
+              <a:srgbClr val="B4C7D2"/>
             </a:solidFill>
           </a:ln>
           <a:effectLst/>
@@ -3187,16 +3187,16 @@
           <p:nvPr/>
         </p:nvCxnSpPr>
         <p:spPr>
-          <a:xfrm flipV="1">
-            <a:off x="1082421" y="2865582"/>
-            <a:ext cx="76581" cy="10988"/>
+          <a:xfrm>
+            <a:off x="914400" y="4937760"/>
+            <a:ext cx="0" cy="64008"/>
           </a:xfrm>
           <a:prstGeom prst="line">
             <a:avLst/>
           </a:prstGeom>
-          <a:ln w="25400">
+          <a:ln w="12700">
             <a:solidFill>
-              <a:srgbClr val="8EDBD4"/>
+              <a:srgbClr val="B4C7D2"/>
             </a:solidFill>
           </a:ln>
           <a:effectLst/>
@@ -3209,43 +3209,61 @@
           <p:nvPr/>
         </p:nvCxnSpPr>
         <p:spPr>
-          <a:xfrm flipV="1">
-            <a:off x="1159002" y="2847958"/>
-            <a:ext cx="76581" cy="17624"/>
+          <a:xfrm>
+            <a:off x="914400" y="1371600"/>
+            <a:ext cx="0" cy="3566160"/>
           </a:xfrm>
           <a:prstGeom prst="line">
             <a:avLst/>
           </a:prstGeom>
-          <a:ln w="25400">
+          <a:ln w="7620">
             <a:solidFill>
-              <a:srgbClr val="8EDBD4"/>
+              <a:srgbClr val="2E4756"/>
             </a:solidFill>
           </a:ln>
           <a:effectLst/>
         </p:spPr>
       </p:cxnSp>
-      <p:cxnSp>
-        <p:nvCxnSpPr>
-          <p:cNvPr id="7" name="C4-E21 line 5" descr="sci-ppt:o005"/>
-          <p:cNvCxnSpPr/>
+      <p:sp>
+        <p:nvSpPr>
+          <p:cNvPr id="7" name="C4-E21 text 5" descr="sci-ppt:o005"/>
+          <p:cNvSpPr txBox="1"/>
           <p:nvPr/>
-        </p:nvCxnSpPr>
-        <p:spPr>
-          <a:xfrm flipV="1">
-            <a:off x="1235583" y="2824243"/>
-            <a:ext cx="76581" cy="23715"/>
-          </a:xfrm>
-          <a:prstGeom prst="line">
+        </p:nvSpPr>
+        <p:spPr>
+          <a:xfrm>
+            <a:off x="457200" y="5020056"/>
+            <a:ext cx="914400" cy="208407"/>
+          </a:xfrm>
+          <a:prstGeom prst="rect">
             <a:avLst/>
           </a:prstGeom>
-          <a:ln w="25400">
-            <a:solidFill>
-              <a:srgbClr val="8EDBD4"/>
-            </a:solidFill>
-          </a:ln>
+          <a:noFill/>
           <a:effectLst/>
         </p:spPr>
-      </p:cxnSp>
+        <p:txBody>
+          <a:bodyPr wrap="none" lIns="18288" rIns="18288" tIns="18288" bIns="18288" anchor="t">
+            <a:spAutoFit/>
+          </a:bodyPr>
+          <a:lstStyle/>
+          <a:p>
+            <a:pPr algn="ctr">
+              <a:spcAft>
+                <a:spcPts val="0"/>
+              </a:spcAft>
+            </a:pPr>
+            <a:r>
+              <a:rPr sz="1050" b="0" i="0">
+                <a:solidFill>
+                  <a:srgbClr val="B4C7D2"/>
+                </a:solidFill>
+                <a:latin typeface="Arial"/>
+              </a:rPr>
+              <a:t>0.0</a:t>
+            </a:r>
+          </a:p>
+        </p:txBody>
+      </p:sp>
       <p:cxnSp>
         <p:nvCxnSpPr>
           <p:cNvPr id="8" name="C4-E21 line 6" descr="sci-ppt:o006"/>
@@ -3253,16 +3271,16 @@
           <p:nvPr/>
         </p:nvCxnSpPr>
         <p:spPr>
-          <a:xfrm flipV="1">
-            <a:off x="1312164" y="2794969"/>
-            <a:ext cx="76581" cy="29274"/>
+          <a:xfrm>
+            <a:off x="2331720" y="4937760"/>
+            <a:ext cx="0" cy="64008"/>
           </a:xfrm>
           <a:prstGeom prst="line">
             <a:avLst/>
           </a:prstGeom>
-          <a:ln w="25400">
+          <a:ln w="12700">
             <a:solidFill>
-              <a:srgbClr val="8EDBD4"/>
+              <a:srgbClr val="B4C7D2"/>
             </a:solidFill>
           </a:ln>
           <a:effectLst/>
@@ -3275,43 +3293,61 @@
           <p:nvPr/>
         </p:nvCxnSpPr>
         <p:spPr>
-          <a:xfrm flipV="1">
-            <a:off x="1388745" y="2760655"/>
-            <a:ext cx="76581" cy="34314"/>
+          <a:xfrm>
+            <a:off x="2331720" y="1371600"/>
+            <a:ext cx="0" cy="3566160"/>
           </a:xfrm>
           <a:prstGeom prst="line">
             <a:avLst/>
           </a:prstGeom>
-          <a:ln w="25400">
+          <a:ln w="7620">
             <a:solidFill>
-              <a:srgbClr val="8EDBD4"/>
+              <a:srgbClr val="2E4756"/>
             </a:solidFill>
           </a:ln>
           <a:effectLst/>
         </p:spPr>
       </p:cxnSp>
-      <p:cxnSp>
-        <p:nvCxnSpPr>
-          <p:cNvPr id="10" name="C4-E21 line 8" descr="sci-ppt:o008"/>
-          <p:cNvCxnSpPr/>
+      <p:sp>
+        <p:nvSpPr>
+          <p:cNvPr id="10" name="C4-E21 text 8" descr="sci-ppt:o008"/>
+          <p:cNvSpPr txBox="1"/>
           <p:nvPr/>
-        </p:nvCxnSpPr>
-        <p:spPr>
-          <a:xfrm flipV="1">
-            <a:off x="1465326" y="2721802"/>
-            <a:ext cx="76581" cy="38853"/>
-          </a:xfrm>
-          <a:prstGeom prst="line">
+        </p:nvSpPr>
+        <p:spPr>
+          <a:xfrm>
+            <a:off x="1874519" y="5020056"/>
+            <a:ext cx="914400" cy="208407"/>
+          </a:xfrm>
+          <a:prstGeom prst="rect">
             <a:avLst/>
           </a:prstGeom>
-          <a:ln w="25400">
-            <a:solidFill>
-              <a:srgbClr val="8EDBD4"/>
-            </a:solidFill>
-          </a:ln>
+          <a:noFill/>
           <a:effectLst/>
         </p:spPr>
-      </p:cxnSp>
+        <p:txBody>
+          <a:bodyPr wrap="none" lIns="18288" rIns="18288" tIns="18288" bIns="18288" anchor="t">
+            <a:spAutoFit/>
+          </a:bodyPr>
+          <a:lstStyle/>
+          <a:p>
+            <a:pPr algn="ctr">
+              <a:spcAft>
+                <a:spcPts val="0"/>
+              </a:spcAft>
+            </a:pPr>
+            <a:r>
+              <a:rPr sz="1050" b="0" i="0">
+                <a:solidFill>
+                  <a:srgbClr val="B4C7D2"/>
+                </a:solidFill>
+                <a:latin typeface="Arial"/>
+              </a:rPr>
+              <a:t>0.5</a:t>
+            </a:r>
+          </a:p>
+        </p:txBody>
+      </p:sp>
       <p:cxnSp>
         <p:nvCxnSpPr>
           <p:cNvPr id="11" name="C4-E21 line 9" descr="sci-ppt:o009"/>
@@ -3319,16 +3355,16 @@
           <p:nvPr/>
         </p:nvCxnSpPr>
         <p:spPr>
-          <a:xfrm flipV="1">
-            <a:off x="1541907" y="2678899"/>
-            <a:ext cx="76581" cy="42903"/>
+          <a:xfrm>
+            <a:off x="3749039" y="4937760"/>
+            <a:ext cx="0" cy="64008"/>
           </a:xfrm>
           <a:prstGeom prst="line">
             <a:avLst/>
           </a:prstGeom>
-          <a:ln w="25400">
+          <a:ln w="12700">
             <a:solidFill>
-              <a:srgbClr val="8EDBD4"/>
+              <a:srgbClr val="B4C7D2"/>
             </a:solidFill>
           </a:ln>
           <a:effectLst/>
@@ -3341,43 +3377,61 @@
           <p:nvPr/>
         </p:nvCxnSpPr>
         <p:spPr>
-          <a:xfrm flipV="1">
-            <a:off x="1618488" y="2632419"/>
-            <a:ext cx="76581" cy="46480"/>
+          <a:xfrm>
+            <a:off x="3749039" y="1371600"/>
+            <a:ext cx="0" cy="3566160"/>
           </a:xfrm>
           <a:prstGeom prst="line">
             <a:avLst/>
           </a:prstGeom>
-          <a:ln w="25400">
+          <a:ln w="7620">
             <a:solidFill>
-              <a:srgbClr val="8EDBD4"/>
+              <a:srgbClr val="2E4756"/>
             </a:solidFill>
           </a:ln>
           <a:effectLst/>
         </p:spPr>
       </p:cxnSp>
-      <p:cxnSp>
-        <p:nvCxnSpPr>
-          <p:cNvPr id="13" name="C4-E21 line 11" descr="sci-ppt:o011"/>
-          <p:cNvCxnSpPr/>
+      <p:sp>
+        <p:nvSpPr>
+          <p:cNvPr id="13" name="C4-E21 text 11" descr="sci-ppt:o011"/>
+          <p:cNvSpPr txBox="1"/>
           <p:nvPr/>
-        </p:nvCxnSpPr>
-        <p:spPr>
-          <a:xfrm flipV="1">
-            <a:off x="1695069" y="2582822"/>
-            <a:ext cx="76581" cy="49597"/>
-          </a:xfrm>
-          <a:prstGeom prst="line">
+        </p:nvSpPr>
+        <p:spPr>
+          <a:xfrm>
+            <a:off x="3291839" y="5020056"/>
+            <a:ext cx="914400" cy="208407"/>
+          </a:xfrm>
+          <a:prstGeom prst="rect">
             <a:avLst/>
           </a:prstGeom>
-          <a:ln w="25400">
-            <a:solidFill>
-              <a:srgbClr val="8EDBD4"/>
-            </a:solidFill>
-          </a:ln>
+          <a:noFill/>
           <a:effectLst/>
         </p:spPr>
-      </p:cxnSp>
+        <p:txBody>
+          <a:bodyPr wrap="none" lIns="18288" rIns="18288" tIns="18288" bIns="18288" anchor="t">
+            <a:spAutoFit/>
+          </a:bodyPr>
+          <a:lstStyle/>
+          <a:p>
+            <a:pPr algn="ctr">
+              <a:spcAft>
+                <a:spcPts val="0"/>
+              </a:spcAft>
+            </a:pPr>
+            <a:r>
+              <a:rPr sz="1050" b="0" i="0">
+                <a:solidFill>
+                  <a:srgbClr val="B4C7D2"/>
+                </a:solidFill>
+                <a:latin typeface="Arial"/>
+              </a:rPr>
+              <a:t>1.0</a:t>
+            </a:r>
+          </a:p>
+        </p:txBody>
+      </p:sp>
       <p:cxnSp>
         <p:nvCxnSpPr>
           <p:cNvPr id="14" name="C4-E21 line 12" descr="sci-ppt:o012"/>
@@ -3385,16 +3439,16 @@
           <p:nvPr/>
         </p:nvCxnSpPr>
         <p:spPr>
-          <a:xfrm flipV="1">
-            <a:off x="1771650" y="2530552"/>
-            <a:ext cx="76581" cy="52270"/>
+          <a:xfrm>
+            <a:off x="5166360" y="4937760"/>
+            <a:ext cx="0" cy="64008"/>
           </a:xfrm>
           <a:prstGeom prst="line">
             <a:avLst/>
           </a:prstGeom>
-          <a:ln w="25400">
+          <a:ln w="12700">
             <a:solidFill>
-              <a:srgbClr val="8EDBD4"/>
+              <a:srgbClr val="B4C7D2"/>
             </a:solidFill>
           </a:ln>
           <a:effectLst/>
@@ -3407,43 +3461,61 @@
           <p:nvPr/>
         </p:nvCxnSpPr>
         <p:spPr>
-          <a:xfrm flipV="1">
-            <a:off x="1848231" y="2476039"/>
-            <a:ext cx="76581" cy="54513"/>
+          <a:xfrm>
+            <a:off x="5166360" y="1371600"/>
+            <a:ext cx="0" cy="3566160"/>
           </a:xfrm>
           <a:prstGeom prst="line">
             <a:avLst/>
           </a:prstGeom>
-          <a:ln w="25400">
+          <a:ln w="7620">
             <a:solidFill>
-              <a:srgbClr val="8EDBD4"/>
+              <a:srgbClr val="2E4756"/>
             </a:solidFill>
           </a:ln>
           <a:effectLst/>
         </p:spPr>
       </p:cxnSp>
-      <p:cxnSp>
-        <p:nvCxnSpPr>
-          <p:cNvPr id="16" name="C4-E21 line 14" descr="sci-ppt:o014"/>
-          <p:cNvCxnSpPr/>
+      <p:sp>
+        <p:nvSpPr>
+          <p:cNvPr id="16" name="C4-E21 text 14" descr="sci-ppt:o014"/>
+          <p:cNvSpPr txBox="1"/>
           <p:nvPr/>
-        </p:nvCxnSpPr>
-        <p:spPr>
-          <a:xfrm flipV="1">
-            <a:off x="1924812" y="2419698"/>
-            <a:ext cx="76581" cy="56341"/>
-          </a:xfrm>
-          <a:prstGeom prst="line">
+        </p:nvSpPr>
+        <p:spPr>
+          <a:xfrm>
+            <a:off x="4709160" y="5020056"/>
+            <a:ext cx="914400" cy="208407"/>
+          </a:xfrm>
+          <a:prstGeom prst="rect">
             <a:avLst/>
           </a:prstGeom>
-          <a:ln w="25400">
-            <a:solidFill>
-              <a:srgbClr val="8EDBD4"/>
-            </a:solidFill>
-          </a:ln>
+          <a:noFill/>
           <a:effectLst/>
         </p:spPr>
-      </p:cxnSp>
+        <p:txBody>
+          <a:bodyPr wrap="none" lIns="18288" rIns="18288" tIns="18288" bIns="18288" anchor="t">
+            <a:spAutoFit/>
+          </a:bodyPr>
+          <a:lstStyle/>
+          <a:p>
+            <a:pPr algn="ctr">
+              <a:spcAft>
+                <a:spcPts val="0"/>
+              </a:spcAft>
+            </a:pPr>
+            <a:r>
+              <a:rPr sz="1050" b="0" i="0">
+                <a:solidFill>
+                  <a:srgbClr val="B4C7D2"/>
+                </a:solidFill>
+                <a:latin typeface="Arial"/>
+              </a:rPr>
+              <a:t>1.5</a:t>
+            </a:r>
+          </a:p>
+        </p:txBody>
+      </p:sp>
       <p:cxnSp>
         <p:nvCxnSpPr>
           <p:cNvPr id="17" name="C4-E21 line 15" descr="sci-ppt:o015"/>
@@ -3451,16 +3523,16 @@
           <p:nvPr/>
         </p:nvCxnSpPr>
         <p:spPr>
-          <a:xfrm flipV="1">
-            <a:off x="2001393" y="2361931"/>
-            <a:ext cx="76581" cy="57767"/>
+          <a:xfrm>
+            <a:off x="6583680" y="4937760"/>
+            <a:ext cx="0" cy="64008"/>
           </a:xfrm>
           <a:prstGeom prst="line">
             <a:avLst/>
           </a:prstGeom>
-          <a:ln w="25400">
+          <a:ln w="12700">
             <a:solidFill>
-              <a:srgbClr val="8EDBD4"/>
+              <a:srgbClr val="B4C7D2"/>
             </a:solidFill>
           </a:ln>
           <a:effectLst/>
@@ -3473,43 +3545,61 @@
           <p:nvPr/>
         </p:nvCxnSpPr>
         <p:spPr>
-          <a:xfrm flipV="1">
-            <a:off x="2077974" y="2303122"/>
-            <a:ext cx="76581" cy="58809"/>
+          <a:xfrm>
+            <a:off x="6583680" y="1371600"/>
+            <a:ext cx="0" cy="3566160"/>
           </a:xfrm>
           <a:prstGeom prst="line">
             <a:avLst/>
           </a:prstGeom>
-          <a:ln w="25400">
+          <a:ln w="7620">
             <a:solidFill>
-              <a:srgbClr val="8EDBD4"/>
+              <a:srgbClr val="2E4756"/>
             </a:solidFill>
           </a:ln>
           <a:effectLst/>
         </p:spPr>
       </p:cxnSp>
-      <p:cxnSp>
-        <p:nvCxnSpPr>
-          <p:cNvPr id="19" name="C4-E21 line 17" descr="sci-ppt:o017"/>
-          <p:cNvCxnSpPr/>
+      <p:sp>
+        <p:nvSpPr>
+          <p:cNvPr id="19" name="C4-E21 text 17" descr="sci-ppt:o017"/>
+          <p:cNvSpPr txBox="1"/>
           <p:nvPr/>
-        </p:nvCxnSpPr>
-        <p:spPr>
-          <a:xfrm flipV="1">
-            <a:off x="2154555" y="2243644"/>
-            <a:ext cx="76581" cy="59478"/>
-          </a:xfrm>
-          <a:prstGeom prst="line">
+        </p:nvSpPr>
+        <p:spPr>
+          <a:xfrm>
+            <a:off x="6126480" y="5020056"/>
+            <a:ext cx="914400" cy="208407"/>
+          </a:xfrm>
+          <a:prstGeom prst="rect">
             <a:avLst/>
           </a:prstGeom>
-          <a:ln w="25400">
-            <a:solidFill>
-              <a:srgbClr val="8EDBD4"/>
-            </a:solidFill>
-          </a:ln>
+          <a:noFill/>
           <a:effectLst/>
         </p:spPr>
-      </p:cxnSp>
+        <p:txBody>
+          <a:bodyPr wrap="none" lIns="18288" rIns="18288" tIns="18288" bIns="18288" anchor="t">
+            <a:spAutoFit/>
+          </a:bodyPr>
+          <a:lstStyle/>
+          <a:p>
+            <a:pPr algn="ctr">
+              <a:spcAft>
+                <a:spcPts val="0"/>
+              </a:spcAft>
+            </a:pPr>
+            <a:r>
+              <a:rPr sz="1050" b="0" i="0">
+                <a:solidFill>
+                  <a:srgbClr val="B4C7D2"/>
+                </a:solidFill>
+                <a:latin typeface="Arial"/>
+              </a:rPr>
+              <a:t>2.0</a:t>
+            </a:r>
+          </a:p>
+        </p:txBody>
+      </p:sp>
       <p:cxnSp>
         <p:nvCxnSpPr>
           <p:cNvPr id="20" name="C4-E21 line 18" descr="sci-ppt:o018"/>
@@ -3517,16 +3607,16 @@
           <p:nvPr/>
         </p:nvCxnSpPr>
         <p:spPr>
-          <a:xfrm flipV="1">
-            <a:off x="2231136" y="2183855"/>
-            <a:ext cx="76581" cy="59789"/>
+          <a:xfrm>
+            <a:off x="850392" y="4937760"/>
+            <a:ext cx="64008" cy="0"/>
           </a:xfrm>
           <a:prstGeom prst="line">
             <a:avLst/>
           </a:prstGeom>
-          <a:ln w="25400">
+          <a:ln w="12700">
             <a:solidFill>
-              <a:srgbClr val="8EDBD4"/>
+              <a:srgbClr val="B4C7D2"/>
             </a:solidFill>
           </a:ln>
           <a:effectLst/>
@@ -3539,16 +3629,16 @@
           <p:nvPr/>
         </p:nvCxnSpPr>
         <p:spPr>
-          <a:xfrm flipV="1">
-            <a:off x="2307717" y="2124095"/>
-            <a:ext cx="76581" cy="59760"/>
+          <a:xfrm>
+            <a:off x="850392" y="4088674"/>
+            <a:ext cx="64008" cy="0"/>
           </a:xfrm>
           <a:prstGeom prst="line">
             <a:avLst/>
           </a:prstGeom>
-          <a:ln w="25400">
+          <a:ln w="12700">
             <a:solidFill>
-              <a:srgbClr val="8EDBD4"/>
+              <a:srgbClr val="B4C7D2"/>
             </a:solidFill>
           </a:ln>
           <a:effectLst/>
@@ -3561,43 +3651,61 @@
           <p:nvPr/>
         </p:nvCxnSpPr>
         <p:spPr>
-          <a:xfrm flipV="1">
-            <a:off x="2384298" y="2064694"/>
-            <a:ext cx="76581" cy="59401"/>
+          <a:xfrm>
+            <a:off x="914400" y="4088674"/>
+            <a:ext cx="5669280" cy="0"/>
           </a:xfrm>
           <a:prstGeom prst="line">
             <a:avLst/>
           </a:prstGeom>
-          <a:ln w="25400">
+          <a:ln w="7620">
             <a:solidFill>
-              <a:srgbClr val="8EDBD4"/>
+              <a:srgbClr val="2E4756"/>
             </a:solidFill>
           </a:ln>
           <a:effectLst/>
         </p:spPr>
       </p:cxnSp>
-      <p:cxnSp>
-        <p:nvCxnSpPr>
-          <p:cNvPr id="23" name="C4-E21 line 21" descr="sci-ppt:o021"/>
-          <p:cNvCxnSpPr/>
+      <p:sp>
+        <p:nvSpPr>
+          <p:cNvPr id="23" name="C4-E21 text 21" descr="sci-ppt:o021"/>
+          <p:cNvSpPr txBox="1"/>
           <p:nvPr/>
-        </p:nvCxnSpPr>
-        <p:spPr>
-          <a:xfrm flipV="1">
-            <a:off x="2460879" y="2005965"/>
-            <a:ext cx="76581" cy="58729"/>
-          </a:xfrm>
-          <a:prstGeom prst="line">
+        </p:nvSpPr>
+        <p:spPr>
+          <a:xfrm>
+            <a:off x="45720" y="4006378"/>
+            <a:ext cx="777240" cy="208407"/>
+          </a:xfrm>
+          <a:prstGeom prst="rect">
             <a:avLst/>
           </a:prstGeom>
-          <a:ln w="25400">
-            <a:solidFill>
-              <a:srgbClr val="8EDBD4"/>
-            </a:solidFill>
-          </a:ln>
+          <a:noFill/>
           <a:effectLst/>
         </p:spPr>
-      </p:cxnSp>
+        <p:txBody>
+          <a:bodyPr wrap="none" lIns="18288" rIns="18288" tIns="18288" bIns="18288" anchor="t">
+            <a:spAutoFit/>
+          </a:bodyPr>
+          <a:lstStyle/>
+          <a:p>
+            <a:pPr algn="r">
+              <a:spcAft>
+                <a:spcPts val="0"/>
+              </a:spcAft>
+            </a:pPr>
+            <a:r>
+              <a:rPr sz="1050" b="0" i="0">
+                <a:solidFill>
+                  <a:srgbClr val="B4C7D2"/>
+                </a:solidFill>
+                <a:latin typeface="Arial"/>
+              </a:rPr>
+              <a:t>1</a:t>
+            </a:r>
+          </a:p>
+        </p:txBody>
+      </p:sp>
       <p:cxnSp>
         <p:nvCxnSpPr>
           <p:cNvPr id="24" name="C4-E21 line 22" descr="sci-ppt:o022"/>
@@ -3605,16 +3713,16 @@
           <p:nvPr/>
         </p:nvCxnSpPr>
         <p:spPr>
-          <a:xfrm flipV="1">
-            <a:off x="2537460" y="1948205"/>
-            <a:ext cx="76581" cy="57760"/>
+          <a:xfrm>
+            <a:off x="850392" y="3239588"/>
+            <a:ext cx="64008" cy="0"/>
           </a:xfrm>
           <a:prstGeom prst="line">
             <a:avLst/>
           </a:prstGeom>
-          <a:ln w="25400">
+          <a:ln w="12700">
             <a:solidFill>
-              <a:srgbClr val="8EDBD4"/>
+              <a:srgbClr val="B4C7D2"/>
             </a:solidFill>
           </a:ln>
           <a:effectLst/>
@@ -3627,43 +3735,61 @@
           <p:nvPr/>
         </p:nvCxnSpPr>
         <p:spPr>
-          <a:xfrm flipV="1">
-            <a:off x="2614041" y="1891701"/>
-            <a:ext cx="76581" cy="56504"/>
+          <a:xfrm>
+            <a:off x="914400" y="3239588"/>
+            <a:ext cx="5669280" cy="0"/>
           </a:xfrm>
           <a:prstGeom prst="line">
             <a:avLst/>
           </a:prstGeom>
-          <a:ln w="25400">
+          <a:ln w="7620">
             <a:solidFill>
-              <a:srgbClr val="8EDBD4"/>
+              <a:srgbClr val="2E4756"/>
             </a:solidFill>
           </a:ln>
           <a:effectLst/>
         </p:spPr>
       </p:cxnSp>
-      <p:cxnSp>
-        <p:nvCxnSpPr>
-          <p:cNvPr id="26" name="C4-E21 line 24" descr="sci-ppt:o024"/>
-          <p:cNvCxnSpPr/>
+      <p:sp>
+        <p:nvSpPr>
+          <p:cNvPr id="26" name="C4-E21 text 24" descr="sci-ppt:o024"/>
+          <p:cNvSpPr txBox="1"/>
           <p:nvPr/>
-        </p:nvCxnSpPr>
-        <p:spPr>
-          <a:xfrm flipV="1">
-            <a:off x="2690622" y="1836720"/>
-            <a:ext cx="76581" cy="54981"/>
-          </a:xfrm>
-          <a:prstGeom prst="line">
+        </p:nvSpPr>
+        <p:spPr>
+          <a:xfrm>
+            <a:off x="45720" y="3157292"/>
+            <a:ext cx="777240" cy="208407"/>
+          </a:xfrm>
+          <a:prstGeom prst="rect">
             <a:avLst/>
           </a:prstGeom>
-          <a:ln w="25400">
-            <a:solidFill>
-              <a:srgbClr val="8EDBD4"/>
-            </a:solidFill>
-          </a:ln>
+          <a:noFill/>
           <a:effectLst/>
         </p:spPr>
-      </p:cxnSp>
+        <p:txBody>
+          <a:bodyPr wrap="none" lIns="18288" rIns="18288" tIns="18288" bIns="18288" anchor="t">
+            <a:spAutoFit/>
+          </a:bodyPr>
+          <a:lstStyle/>
+          <a:p>
+            <a:pPr algn="r">
+              <a:spcAft>
+                <a:spcPts val="0"/>
+              </a:spcAft>
+            </a:pPr>
+            <a:r>
+              <a:rPr sz="1050" b="0" i="0">
+                <a:solidFill>
+                  <a:srgbClr val="B4C7D2"/>
+                </a:solidFill>
+                <a:latin typeface="Arial"/>
+              </a:rPr>
+              <a:t>2</a:t>
+            </a:r>
+          </a:p>
+        </p:txBody>
+      </p:sp>
       <p:cxnSp>
         <p:nvCxnSpPr>
           <p:cNvPr id="27" name="C4-E21 line 25" descr="sci-ppt:o025"/>
@@ -3671,16 +3797,16 @@
           <p:nvPr/>
         </p:nvCxnSpPr>
         <p:spPr>
-          <a:xfrm flipV="1">
-            <a:off x="2767203" y="1783518"/>
-            <a:ext cx="76581" cy="53202"/>
+          <a:xfrm>
+            <a:off x="850392" y="2390502"/>
+            <a:ext cx="64008" cy="0"/>
           </a:xfrm>
           <a:prstGeom prst="line">
             <a:avLst/>
           </a:prstGeom>
-          <a:ln w="25400">
+          <a:ln w="12700">
             <a:solidFill>
-              <a:srgbClr val="8EDBD4"/>
+              <a:srgbClr val="B4C7D2"/>
             </a:solidFill>
           </a:ln>
           <a:effectLst/>
@@ -3693,43 +3819,61 @@
           <p:nvPr/>
         </p:nvCxnSpPr>
         <p:spPr>
-          <a:xfrm flipV="1">
-            <a:off x="2843784" y="1732337"/>
-            <a:ext cx="76581" cy="51181"/>
+          <a:xfrm>
+            <a:off x="914400" y="2390502"/>
+            <a:ext cx="5669280" cy="0"/>
           </a:xfrm>
           <a:prstGeom prst="line">
             <a:avLst/>
           </a:prstGeom>
-          <a:ln w="25400">
+          <a:ln w="7620">
             <a:solidFill>
-              <a:srgbClr val="8EDBD4"/>
+              <a:srgbClr val="2E4756"/>
             </a:solidFill>
           </a:ln>
           <a:effectLst/>
         </p:spPr>
       </p:cxnSp>
-      <p:cxnSp>
-        <p:nvCxnSpPr>
-          <p:cNvPr id="29" name="C4-E21 line 27" descr="sci-ppt:o027"/>
-          <p:cNvCxnSpPr/>
+      <p:sp>
+        <p:nvSpPr>
+          <p:cNvPr id="29" name="C4-E21 text 27" descr="sci-ppt:o027"/>
+          <p:cNvSpPr txBox="1"/>
           <p:nvPr/>
-        </p:nvCxnSpPr>
-        <p:spPr>
-          <a:xfrm flipV="1">
-            <a:off x="2920365" y="1683400"/>
-            <a:ext cx="76581" cy="48937"/>
-          </a:xfrm>
-          <a:prstGeom prst="line">
+        </p:nvSpPr>
+        <p:spPr>
+          <a:xfrm>
+            <a:off x="45720" y="2308206"/>
+            <a:ext cx="777240" cy="208407"/>
+          </a:xfrm>
+          <a:prstGeom prst="rect">
             <a:avLst/>
           </a:prstGeom>
-          <a:ln w="25400">
-            <a:solidFill>
-              <a:srgbClr val="8EDBD4"/>
-            </a:solidFill>
-          </a:ln>
+          <a:noFill/>
           <a:effectLst/>
         </p:spPr>
-      </p:cxnSp>
+        <p:txBody>
+          <a:bodyPr wrap="none" lIns="18288" rIns="18288" tIns="18288" bIns="18288" anchor="t">
+            <a:spAutoFit/>
+          </a:bodyPr>
+          <a:lstStyle/>
+          <a:p>
+            <a:pPr algn="r">
+              <a:spcAft>
+                <a:spcPts val="0"/>
+              </a:spcAft>
+            </a:pPr>
+            <a:r>
+              <a:rPr sz="1050" b="0" i="0">
+                <a:solidFill>
+                  <a:srgbClr val="B4C7D2"/>
+                </a:solidFill>
+                <a:latin typeface="Arial"/>
+              </a:rPr>
+              <a:t>3</a:t>
+            </a:r>
+          </a:p>
+        </p:txBody>
+      </p:sp>
       <p:cxnSp>
         <p:nvCxnSpPr>
           <p:cNvPr id="30" name="C4-E21 line 28" descr="sci-ppt:o028"/>
@@ -3737,16 +3881,16 @@
           <p:nvPr/>
         </p:nvCxnSpPr>
         <p:spPr>
-          <a:xfrm flipV="1">
-            <a:off x="2996946" y="1636921"/>
-            <a:ext cx="76581" cy="46479"/>
+          <a:xfrm>
+            <a:off x="850392" y="1541417"/>
+            <a:ext cx="64008" cy="0"/>
           </a:xfrm>
           <a:prstGeom prst="line">
             <a:avLst/>
           </a:prstGeom>
-          <a:ln w="25400">
+          <a:ln w="12700">
             <a:solidFill>
-              <a:srgbClr val="8EDBD4"/>
+              <a:srgbClr val="B4C7D2"/>
             </a:solidFill>
           </a:ln>
           <a:effectLst/>
@@ -3759,109 +3903,479 @@
           <p:nvPr/>
         </p:nvCxnSpPr>
         <p:spPr>
-          <a:xfrm flipV="1">
-            <a:off x="3073527" y="1593095"/>
-            <a:ext cx="76581" cy="43826"/>
+          <a:xfrm>
+            <a:off x="914400" y="1541417"/>
+            <a:ext cx="5669280" cy="0"/>
           </a:xfrm>
           <a:prstGeom prst="line">
             <a:avLst/>
           </a:prstGeom>
-          <a:ln w="25400">
+          <a:ln w="7620">
+            <a:solidFill>
+              <a:srgbClr val="2E4756"/>
+            </a:solidFill>
+          </a:ln>
+          <a:effectLst/>
+        </p:spPr>
+      </p:cxnSp>
+      <p:sp>
+        <p:nvSpPr>
+          <p:cNvPr id="32" name="C4-E21 text 30" descr="sci-ppt:o030"/>
+          <p:cNvSpPr txBox="1"/>
+          <p:nvPr/>
+        </p:nvSpPr>
+        <p:spPr>
+          <a:xfrm>
+            <a:off x="45720" y="1459121"/>
+            <a:ext cx="777240" cy="208407"/>
+          </a:xfrm>
+          <a:prstGeom prst="rect">
+            <a:avLst/>
+          </a:prstGeom>
+          <a:noFill/>
+          <a:effectLst/>
+        </p:spPr>
+        <p:txBody>
+          <a:bodyPr wrap="none" lIns="18288" rIns="18288" tIns="18288" bIns="18288" anchor="t">
+            <a:spAutoFit/>
+          </a:bodyPr>
+          <a:lstStyle/>
+          <a:p>
+            <a:pPr algn="r">
+              <a:spcAft>
+                <a:spcPts val="0"/>
+              </a:spcAft>
+            </a:pPr>
+            <a:r>
+              <a:rPr sz="1050" b="0" i="0">
+                <a:solidFill>
+                  <a:srgbClr val="B4C7D2"/>
+                </a:solidFill>
+                <a:latin typeface="Arial"/>
+              </a:rPr>
+              <a:t>4</a:t>
+            </a:r>
+          </a:p>
+        </p:txBody>
+      </p:sp>
+      <p:sp>
+        <p:nvSpPr>
+          <p:cNvPr id="33" name="C4-E21 text 31" descr="sci-ppt:o031"/>
+          <p:cNvSpPr txBox="1"/>
+          <p:nvPr/>
+        </p:nvSpPr>
+        <p:spPr>
+          <a:xfrm>
+            <a:off x="914400" y="5221224"/>
+            <a:ext cx="5669280" cy="231648"/>
+          </a:xfrm>
+          <a:prstGeom prst="rect">
+            <a:avLst/>
+          </a:prstGeom>
+          <a:noFill/>
+          <a:effectLst/>
+        </p:spPr>
+        <p:txBody>
+          <a:bodyPr wrap="none" lIns="18288" rIns="18288" tIns="18288" bIns="18288" anchor="t">
+            <a:spAutoFit/>
+          </a:bodyPr>
+          <a:lstStyle/>
+          <a:p>
+            <a:pPr algn="ctr">
+              <a:spcAft>
+                <a:spcPts val="0"/>
+              </a:spcAft>
+            </a:pPr>
+            <a:r>
+              <a:rPr sz="1200" b="0" i="0">
+                <a:solidFill>
+                  <a:srgbClr val="E7F0F3"/>
+                </a:solidFill>
+                <a:latin typeface="Arial"/>
+              </a:rPr>
+              <a:t>p₀ / p₀,crit</a:t>
+            </a:r>
+          </a:p>
+        </p:txBody>
+      </p:sp>
+      <p:sp>
+        <p:nvSpPr>
+          <p:cNvPr id="34" name="C4-E21 text 32" descr="sci-ppt:o032"/>
+          <p:cNvSpPr txBox="1"/>
+          <p:nvPr/>
+        </p:nvSpPr>
+        <p:spPr>
+          <a:xfrm>
+            <a:off x="365760" y="1024128"/>
+            <a:ext cx="5669280" cy="231648"/>
+          </a:xfrm>
+          <a:prstGeom prst="rect">
+            <a:avLst/>
+          </a:prstGeom>
+          <a:noFill/>
+          <a:effectLst/>
+        </p:spPr>
+        <p:txBody>
+          <a:bodyPr wrap="none" lIns="18288" rIns="18288" tIns="18288" bIns="18288" anchor="t">
+            <a:spAutoFit/>
+          </a:bodyPr>
+          <a:lstStyle/>
+          <a:p>
+            <a:pPr algn="l">
+              <a:spcAft>
+                <a:spcPts val="0"/>
+              </a:spcAft>
+            </a:pPr>
+            <a:r>
+              <a:rPr sz="1200" b="0" i="0">
+                <a:solidFill>
+                  <a:srgbClr val="E7F0F3"/>
+                </a:solidFill>
+                <a:latin typeface="Arial"/>
+              </a:rPr>
+              <a:t>G / Γ</a:t>
+            </a:r>
+          </a:p>
+        </p:txBody>
+      </p:sp>
+      <p:sp>
+        <p:nvSpPr>
+          <p:cNvPr id="35" name="C4-E21 polygon 33" descr="sci-ppt:o033"/>
+          <p:cNvSpPr/>
+          <p:nvPr/>
+        </p:nvSpPr>
+        <p:spPr>
+          <a:xfrm>
+            <a:off x="914400" y="1541417"/>
+            <a:ext cx="5669280" cy="3396343"/>
+          </a:xfrm>
+          <a:custGeom>
+            <a:avLst/>
+            <a:gdLst/>
+            <a:ahLst/>
+            <a:cxnLst/>
+            <a:rect l="l" t="t" r="r" b="b"/>
+            <a:pathLst>
+              <a:path w="5669280" h="3396343">
+                <a:moveTo>
+                  <a:pt x="0" y="3396343"/>
+                </a:moveTo>
+                <a:lnTo>
+                  <a:pt x="57265" y="3395996"/>
+                </a:lnTo>
+                <a:lnTo>
+                  <a:pt x="114530" y="3394956"/>
+                </a:lnTo>
+                <a:lnTo>
+                  <a:pt x="171796" y="3393224"/>
+                </a:lnTo>
+                <a:lnTo>
+                  <a:pt x="229061" y="3390798"/>
+                </a:lnTo>
+                <a:lnTo>
+                  <a:pt x="286327" y="3387679"/>
+                </a:lnTo>
+                <a:lnTo>
+                  <a:pt x="343592" y="3383867"/>
+                </a:lnTo>
+                <a:lnTo>
+                  <a:pt x="400858" y="3379363"/>
+                </a:lnTo>
+                <a:lnTo>
+                  <a:pt x="458123" y="3374165"/>
+                </a:lnTo>
+                <a:lnTo>
+                  <a:pt x="515389" y="3368274"/>
+                </a:lnTo>
+                <a:lnTo>
+                  <a:pt x="572654" y="3361689"/>
+                </a:lnTo>
+                <a:lnTo>
+                  <a:pt x="629920" y="3354412"/>
+                </a:lnTo>
+                <a:lnTo>
+                  <a:pt x="687185" y="3346442"/>
+                </a:lnTo>
+                <a:lnTo>
+                  <a:pt x="744450" y="3337779"/>
+                </a:lnTo>
+                <a:lnTo>
+                  <a:pt x="801716" y="3328423"/>
+                </a:lnTo>
+                <a:lnTo>
+                  <a:pt x="858981" y="3318373"/>
+                </a:lnTo>
+                <a:lnTo>
+                  <a:pt x="916247" y="3307631"/>
+                </a:lnTo>
+                <a:lnTo>
+                  <a:pt x="973512" y="3296195"/>
+                </a:lnTo>
+                <a:lnTo>
+                  <a:pt x="1030778" y="3284067"/>
+                </a:lnTo>
+                <a:lnTo>
+                  <a:pt x="1088043" y="3271245"/>
+                </a:lnTo>
+                <a:lnTo>
+                  <a:pt x="1145309" y="3257730"/>
+                </a:lnTo>
+                <a:lnTo>
+                  <a:pt x="1202574" y="3243523"/>
+                </a:lnTo>
+                <a:lnTo>
+                  <a:pt x="1259840" y="3228622"/>
+                </a:lnTo>
+                <a:lnTo>
+                  <a:pt x="1317105" y="3213028"/>
+                </a:lnTo>
+                <a:lnTo>
+                  <a:pt x="1374370" y="3196741"/>
+                </a:lnTo>
+                <a:lnTo>
+                  <a:pt x="1431636" y="3179761"/>
+                </a:lnTo>
+                <a:lnTo>
+                  <a:pt x="1488901" y="3162088"/>
+                </a:lnTo>
+                <a:lnTo>
+                  <a:pt x="1546167" y="3143722"/>
+                </a:lnTo>
+                <a:lnTo>
+                  <a:pt x="1603432" y="3124663"/>
+                </a:lnTo>
+                <a:lnTo>
+                  <a:pt x="1660698" y="3104911"/>
+                </a:lnTo>
+                <a:lnTo>
+                  <a:pt x="1717963" y="3084465"/>
+                </a:lnTo>
+                <a:lnTo>
+                  <a:pt x="1775229" y="3063327"/>
+                </a:lnTo>
+                <a:lnTo>
+                  <a:pt x="1832494" y="3041496"/>
+                </a:lnTo>
+                <a:lnTo>
+                  <a:pt x="1889760" y="3018971"/>
+                </a:lnTo>
+                <a:lnTo>
+                  <a:pt x="1947025" y="2995754"/>
+                </a:lnTo>
+                <a:lnTo>
+                  <a:pt x="2004290" y="2971843"/>
+                </a:lnTo>
+                <a:lnTo>
+                  <a:pt x="2061556" y="2947239"/>
+                </a:lnTo>
+                <a:lnTo>
+                  <a:pt x="2118821" y="2921943"/>
+                </a:lnTo>
+                <a:lnTo>
+                  <a:pt x="2176087" y="2895953"/>
+                </a:lnTo>
+                <a:lnTo>
+                  <a:pt x="2233352" y="2869270"/>
+                </a:lnTo>
+                <a:lnTo>
+                  <a:pt x="2290618" y="2841894"/>
+                </a:lnTo>
+                <a:lnTo>
+                  <a:pt x="2347883" y="2813825"/>
+                </a:lnTo>
+                <a:lnTo>
+                  <a:pt x="2405149" y="2785063"/>
+                </a:lnTo>
+                <a:lnTo>
+                  <a:pt x="2462414" y="2755608"/>
+                </a:lnTo>
+                <a:lnTo>
+                  <a:pt x="2519680" y="2725460"/>
+                </a:lnTo>
+                <a:lnTo>
+                  <a:pt x="2576945" y="2694619"/>
+                </a:lnTo>
+                <a:lnTo>
+                  <a:pt x="2634210" y="2663085"/>
+                </a:lnTo>
+                <a:lnTo>
+                  <a:pt x="2691476" y="2630857"/>
+                </a:lnTo>
+                <a:lnTo>
+                  <a:pt x="2748741" y="2597937"/>
+                </a:lnTo>
+                <a:lnTo>
+                  <a:pt x="2806007" y="2564323"/>
+                </a:lnTo>
+                <a:lnTo>
+                  <a:pt x="2863272" y="2530017"/>
+                </a:lnTo>
+                <a:lnTo>
+                  <a:pt x="2920538" y="2495017"/>
+                </a:lnTo>
+                <a:lnTo>
+                  <a:pt x="2977803" y="2459325"/>
+                </a:lnTo>
+                <a:lnTo>
+                  <a:pt x="3035069" y="2422939"/>
+                </a:lnTo>
+                <a:lnTo>
+                  <a:pt x="3092334" y="2385860"/>
+                </a:lnTo>
+                <a:lnTo>
+                  <a:pt x="3149600" y="2348089"/>
+                </a:lnTo>
+                <a:lnTo>
+                  <a:pt x="3206865" y="2309624"/>
+                </a:lnTo>
+                <a:lnTo>
+                  <a:pt x="3264130" y="2270466"/>
+                </a:lnTo>
+                <a:lnTo>
+                  <a:pt x="3321396" y="2230615"/>
+                </a:lnTo>
+                <a:lnTo>
+                  <a:pt x="3378661" y="2190071"/>
+                </a:lnTo>
+                <a:lnTo>
+                  <a:pt x="3435927" y="2148834"/>
+                </a:lnTo>
+                <a:lnTo>
+                  <a:pt x="3493192" y="2106903"/>
+                </a:lnTo>
+                <a:lnTo>
+                  <a:pt x="3550458" y="2064280"/>
+                </a:lnTo>
+                <a:lnTo>
+                  <a:pt x="3607723" y="2020964"/>
+                </a:lnTo>
+                <a:lnTo>
+                  <a:pt x="3664989" y="1976955"/>
+                </a:lnTo>
+                <a:lnTo>
+                  <a:pt x="3722254" y="1932252"/>
+                </a:lnTo>
+                <a:lnTo>
+                  <a:pt x="3779520" y="1886857"/>
+                </a:lnTo>
+                <a:lnTo>
+                  <a:pt x="3836785" y="1840768"/>
+                </a:lnTo>
+                <a:lnTo>
+                  <a:pt x="3894050" y="1793987"/>
+                </a:lnTo>
+                <a:lnTo>
+                  <a:pt x="3951316" y="1746512"/>
+                </a:lnTo>
+                <a:lnTo>
+                  <a:pt x="4008581" y="1698344"/>
+                </a:lnTo>
+                <a:lnTo>
+                  <a:pt x="4065847" y="1649484"/>
+                </a:lnTo>
+                <a:lnTo>
+                  <a:pt x="4123112" y="1599930"/>
+                </a:lnTo>
+                <a:lnTo>
+                  <a:pt x="4180378" y="1549683"/>
+                </a:lnTo>
+                <a:lnTo>
+                  <a:pt x="4237643" y="1498743"/>
+                </a:lnTo>
+                <a:lnTo>
+                  <a:pt x="4294909" y="1447110"/>
+                </a:lnTo>
+                <a:lnTo>
+                  <a:pt x="4352174" y="1394784"/>
+                </a:lnTo>
+                <a:lnTo>
+                  <a:pt x="4409440" y="1341765"/>
+                </a:lnTo>
+                <a:lnTo>
+                  <a:pt x="4466705" y="1288053"/>
+                </a:lnTo>
+                <a:lnTo>
+                  <a:pt x="4523970" y="1233647"/>
+                </a:lnTo>
+                <a:lnTo>
+                  <a:pt x="4581236" y="1178549"/>
+                </a:lnTo>
+                <a:lnTo>
+                  <a:pt x="4638501" y="1122758"/>
+                </a:lnTo>
+                <a:lnTo>
+                  <a:pt x="4695767" y="1066273"/>
+                </a:lnTo>
+                <a:lnTo>
+                  <a:pt x="4753032" y="1009096"/>
+                </a:lnTo>
+                <a:lnTo>
+                  <a:pt x="4810298" y="951225"/>
+                </a:lnTo>
+                <a:lnTo>
+                  <a:pt x="4867563" y="892662"/>
+                </a:lnTo>
+                <a:lnTo>
+                  <a:pt x="4924829" y="833405"/>
+                </a:lnTo>
+                <a:lnTo>
+                  <a:pt x="4982094" y="773455"/>
+                </a:lnTo>
+                <a:lnTo>
+                  <a:pt x="5039360" y="712812"/>
+                </a:lnTo>
+                <a:lnTo>
+                  <a:pt x="5096625" y="651476"/>
+                </a:lnTo>
+                <a:lnTo>
+                  <a:pt x="5153890" y="589448"/>
+                </a:lnTo>
+                <a:lnTo>
+                  <a:pt x="5211156" y="526726"/>
+                </a:lnTo>
+                <a:lnTo>
+                  <a:pt x="5268421" y="463311"/>
+                </a:lnTo>
+                <a:lnTo>
+                  <a:pt x="5325687" y="399202"/>
+                </a:lnTo>
+                <a:lnTo>
+                  <a:pt x="5382952" y="334401"/>
+                </a:lnTo>
+                <a:lnTo>
+                  <a:pt x="5440218" y="268907"/>
+                </a:lnTo>
+                <a:lnTo>
+                  <a:pt x="5497483" y="202720"/>
+                </a:lnTo>
+                <a:lnTo>
+                  <a:pt x="5554749" y="135839"/>
+                </a:lnTo>
+                <a:lnTo>
+                  <a:pt x="5612014" y="68266"/>
+                </a:lnTo>
+                <a:lnTo>
+                  <a:pt x="5669280" y="0"/>
+                </a:lnTo>
+              </a:path>
+            </a:pathLst>
+          </a:custGeom>
+          <a:noFill/>
+          <a:ln w="43180">
             <a:solidFill>
               <a:srgbClr val="8EDBD4"/>
             </a:solidFill>
           </a:ln>
           <a:effectLst/>
         </p:spPr>
-      </p:cxnSp>
-      <p:cxnSp>
-        <p:nvCxnSpPr>
-          <p:cNvPr id="32" name="C4-E21 line 30" descr="sci-ppt:o030"/>
-          <p:cNvCxnSpPr/>
-          <p:nvPr/>
-        </p:nvCxnSpPr>
-        <p:spPr>
-          <a:xfrm flipV="1">
-            <a:off x="3150108" y="1552104"/>
-            <a:ext cx="76581" cy="40991"/>
-          </a:xfrm>
-          <a:prstGeom prst="line">
-            <a:avLst/>
-          </a:prstGeom>
-          <a:ln w="25400">
-            <a:solidFill>
-              <a:srgbClr val="8EDBD4"/>
-            </a:solidFill>
-          </a:ln>
-          <a:effectLst/>
-        </p:spPr>
-      </p:cxnSp>
-      <p:cxnSp>
-        <p:nvCxnSpPr>
-          <p:cNvPr id="33" name="C4-E21 line 31" descr="sci-ppt:o031"/>
-          <p:cNvCxnSpPr/>
-          <p:nvPr/>
-        </p:nvCxnSpPr>
-        <p:spPr>
-          <a:xfrm flipV="1">
-            <a:off x="3226689" y="1514117"/>
-            <a:ext cx="76581" cy="37987"/>
-          </a:xfrm>
-          <a:prstGeom prst="line">
-            <a:avLst/>
-          </a:prstGeom>
-          <a:ln w="25400">
-            <a:solidFill>
-              <a:srgbClr val="8EDBD4"/>
-            </a:solidFill>
-          </a:ln>
-          <a:effectLst/>
-        </p:spPr>
-      </p:cxnSp>
-      <p:cxnSp>
-        <p:nvCxnSpPr>
-          <p:cNvPr id="34" name="C4-E21 line 32" descr="sci-ppt:o032"/>
-          <p:cNvCxnSpPr/>
-          <p:nvPr/>
-        </p:nvCxnSpPr>
-        <p:spPr>
-          <a:xfrm flipV="1">
-            <a:off x="3303270" y="1479287"/>
-            <a:ext cx="76581" cy="34830"/>
-          </a:xfrm>
-          <a:prstGeom prst="line">
-            <a:avLst/>
-          </a:prstGeom>
-          <a:ln w="25400">
-            <a:solidFill>
-              <a:srgbClr val="8EDBD4"/>
-            </a:solidFill>
-          </a:ln>
-          <a:effectLst/>
-        </p:spPr>
-      </p:cxnSp>
-      <p:cxnSp>
-        <p:nvCxnSpPr>
-          <p:cNvPr id="35" name="C4-E21 line 33" descr="sci-ppt:o033"/>
-          <p:cNvCxnSpPr/>
-          <p:nvPr/>
-        </p:nvCxnSpPr>
-        <p:spPr>
-          <a:xfrm flipV="1">
-            <a:off x="3379851" y="1447751"/>
-            <a:ext cx="76581" cy="31536"/>
-          </a:xfrm>
-          <a:prstGeom prst="line">
-            <a:avLst/>
-          </a:prstGeom>
-          <a:ln w="25400">
-            <a:solidFill>
-              <a:srgbClr val="8EDBD4"/>
-            </a:solidFill>
-          </a:ln>
-          <a:effectLst/>
-        </p:spPr>
-      </p:cxnSp>
+        <p:txBody>
+          <a:bodyPr rtlCol="0" anchor="ctr"/>
+          <a:lstStyle/>
+          <a:p>
+            <a:pPr algn="ctr"/>
+          </a:p>
+        </p:txBody>
+      </p:sp>
       <p:cxnSp>
         <p:nvCxnSpPr>
           <p:cNvPr id="36" name="C4-E21 line 34" descr="sci-ppt:o034"/>
@@ -3869,17 +4383,18 @@
           <p:nvPr/>
         </p:nvCxnSpPr>
         <p:spPr>
-          <a:xfrm flipV="1">
-            <a:off x="3456432" y="1419633"/>
-            <a:ext cx="76581" cy="28118"/>
+          <a:xfrm>
+            <a:off x="914400" y="4088674"/>
+            <a:ext cx="5669280" cy="0"/>
           </a:xfrm>
           <a:prstGeom prst="line">
             <a:avLst/>
           </a:prstGeom>
-          <a:ln w="25400">
+          <a:ln w="16510">
             <a:solidFill>
-              <a:srgbClr val="8EDBD4"/>
+              <a:srgbClr val="F2B880"/>
             </a:solidFill>
+            <a:prstDash val="dash"/>
           </a:ln>
           <a:effectLst/>
         </p:spPr>
@@ -3891,1057 +4406,422 @@
           <p:nvPr/>
         </p:nvCxnSpPr>
         <p:spPr>
-          <a:xfrm flipV="1">
-            <a:off x="3533013" y="1395044"/>
-            <a:ext cx="76581" cy="24589"/>
+          <a:xfrm>
+            <a:off x="3749039" y="1371600"/>
+            <a:ext cx="0" cy="3566160"/>
           </a:xfrm>
           <a:prstGeom prst="line">
             <a:avLst/>
           </a:prstGeom>
-          <a:ln w="25400">
+          <a:ln w="16510">
+            <a:solidFill>
+              <a:srgbClr val="F2B880"/>
+            </a:solidFill>
+            <a:prstDash val="dash"/>
+          </a:ln>
+          <a:effectLst/>
+        </p:spPr>
+      </p:cxnSp>
+      <p:sp>
+        <p:nvSpPr>
+          <p:cNvPr id="38" name="C4-E21 ellipse 36" descr="sci-ppt:o036"/>
+          <p:cNvSpPr/>
+          <p:nvPr/>
+        </p:nvSpPr>
+        <p:spPr>
+          <a:xfrm>
+            <a:off x="3675887" y="4015522"/>
+            <a:ext cx="146304" cy="146304"/>
+          </a:xfrm>
+          <a:prstGeom prst="ellipse">
+            <a:avLst/>
+          </a:prstGeom>
+          <a:solidFill>
+            <a:srgbClr val="F2B880"/>
+          </a:solidFill>
+          <a:ln w="12700">
+            <a:solidFill>
+              <a:srgbClr val="F2B880"/>
+            </a:solidFill>
+          </a:ln>
+          <a:effectLst/>
+        </p:spPr>
+        <p:txBody>
+          <a:bodyPr rtlCol="0" anchor="ctr"/>
+          <a:lstStyle/>
+          <a:p>
+            <a:pPr algn="ctr"/>
+          </a:p>
+        </p:txBody>
+      </p:sp>
+      <p:sp>
+        <p:nvSpPr>
+          <p:cNvPr id="39" name="C4-E21 text 37" descr="sci-ppt:o037"/>
+          <p:cNvSpPr txBox="1"/>
+          <p:nvPr/>
+        </p:nvSpPr>
+        <p:spPr>
+          <a:xfrm>
+            <a:off x="4073652" y="4500154"/>
+            <a:ext cx="1645920" cy="231648"/>
+          </a:xfrm>
+          <a:prstGeom prst="rect">
+            <a:avLst/>
+          </a:prstGeom>
+          <a:noFill/>
+          <a:effectLst/>
+        </p:spPr>
+        <p:txBody>
+          <a:bodyPr wrap="none" lIns="18288" rIns="18288" tIns="18288" bIns="18288" anchor="t">
+            <a:spAutoFit/>
+          </a:bodyPr>
+          <a:lstStyle/>
+          <a:p>
+            <a:pPr algn="l">
+              <a:spcAft>
+                <a:spcPts val="0"/>
+              </a:spcAft>
+            </a:pPr>
+            <a:r>
+              <a:rPr sz="1200" b="0" i="0">
+                <a:solidFill>
+                  <a:srgbClr val="F2B880"/>
+                </a:solidFill>
+                <a:latin typeface="Arial"/>
+              </a:rPr>
+              <a:t>onset: G = Γ</a:t>
+            </a:r>
+          </a:p>
+        </p:txBody>
+      </p:sp>
+      <p:sp>
+        <p:nvSpPr>
+          <p:cNvPr id="40" name="C4-E21 text 38" descr="sci-ppt:o038"/>
+          <p:cNvSpPr txBox="1"/>
+          <p:nvPr/>
+        </p:nvSpPr>
+        <p:spPr>
+          <a:xfrm>
+            <a:off x="1271016" y="1874520"/>
+            <a:ext cx="2743200" cy="231648"/>
+          </a:xfrm>
+          <a:prstGeom prst="rect">
+            <a:avLst/>
+          </a:prstGeom>
+          <a:noFill/>
+          <a:effectLst/>
+        </p:spPr>
+        <p:txBody>
+          <a:bodyPr wrap="none" lIns="18288" rIns="18288" tIns="18288" bIns="18288" anchor="t">
+            <a:spAutoFit/>
+          </a:bodyPr>
+          <a:lstStyle/>
+          <a:p>
+            <a:pPr algn="l">
+              <a:spcAft>
+                <a:spcPts val="0"/>
+              </a:spcAft>
+            </a:pPr>
+            <a:r>
+              <a:rPr sz="1200" b="0" i="0">
+                <a:solidFill>
+                  <a:srgbClr val="8EDBD4"/>
+                </a:solidFill>
+                <a:latin typeface="Arial"/>
+              </a:rPr>
+              <a:t>G/Γ = (p₀/p₀,crit)²</a:t>
+            </a:r>
+          </a:p>
+        </p:txBody>
+      </p:sp>
+      <p:sp>
+        <p:nvSpPr>
+          <p:cNvPr id="41" name="C4-E21 round_rect 39" descr="sci-ppt:o039"/>
+          <p:cNvSpPr/>
+          <p:nvPr/>
+        </p:nvSpPr>
+        <p:spPr>
+          <a:xfrm>
+            <a:off x="6858000" y="1371600"/>
+            <a:ext cx="4983480" cy="3566160"/>
+          </a:xfrm>
+          <a:prstGeom prst="roundRect">
+            <a:avLst/>
+          </a:prstGeom>
+          <a:solidFill>
+            <a:srgbClr val="213E4B"/>
+          </a:solidFill>
+          <a:ln w="20320">
             <a:solidFill>
               <a:srgbClr val="8EDBD4"/>
             </a:solidFill>
           </a:ln>
           <a:effectLst/>
         </p:spPr>
-      </p:cxnSp>
-      <p:cxnSp>
-        <p:nvCxnSpPr>
-          <p:cNvPr id="38" name="C4-E21 line 36" descr="sci-ppt:o036"/>
-          <p:cNvCxnSpPr/>
+        <p:txBody>
+          <a:bodyPr rtlCol="0" anchor="ctr"/>
+          <a:lstStyle/>
+          <a:p>
+            <a:pPr algn="ctr"/>
+          </a:p>
+        </p:txBody>
+      </p:sp>
+      <p:sp>
+        <p:nvSpPr>
+          <p:cNvPr id="42" name="C4-E21 text 40" descr="sci-ppt:o040"/>
+          <p:cNvSpPr txBox="1"/>
           <p:nvPr/>
-        </p:nvCxnSpPr>
-        <p:spPr>
-          <a:xfrm flipV="1">
-            <a:off x="3609594" y="1374077"/>
-            <a:ext cx="76581" cy="20967"/>
-          </a:xfrm>
-          <a:prstGeom prst="line">
+        </p:nvSpPr>
+        <p:spPr>
+          <a:xfrm>
+            <a:off x="6967728" y="1426464"/>
+            <a:ext cx="4764024" cy="254889"/>
+          </a:xfrm>
+          <a:prstGeom prst="rect">
             <a:avLst/>
           </a:prstGeom>
-          <a:ln w="25400">
+          <a:noFill/>
+          <a:effectLst/>
+        </p:spPr>
+        <p:txBody>
+          <a:bodyPr wrap="none" lIns="18288" rIns="18288" tIns="18288" bIns="18288" anchor="t">
+            <a:spAutoFit/>
+          </a:bodyPr>
+          <a:lstStyle/>
+          <a:p>
+            <a:pPr algn="l">
+              <a:spcAft>
+                <a:spcPts val="0"/>
+              </a:spcAft>
+            </a:pPr>
+            <a:r>
+              <a:rPr sz="1350" b="1" i="0">
+                <a:solidFill>
+                  <a:srgbClr val="8EDBD4"/>
+                </a:solidFill>
+                <a:latin typeface="Arial"/>
+              </a:rPr>
+              <a:t>Threshold pressure</a:t>
+            </a:r>
+          </a:p>
+        </p:txBody>
+      </p:sp>
+      <p:sp>
+        <p:nvSpPr>
+          <p:cNvPr id="43" name="C4-E21 text 41" descr="sci-ppt:o041"/>
+          <p:cNvSpPr txBox="1"/>
+          <p:nvPr/>
+        </p:nvSpPr>
+        <p:spPr>
+          <a:xfrm>
+            <a:off x="6995160" y="1828800"/>
+            <a:ext cx="4754880" cy="247142"/>
+          </a:xfrm>
+          <a:prstGeom prst="rect">
+            <a:avLst/>
+          </a:prstGeom>
+          <a:noFill/>
+          <a:effectLst/>
+        </p:spPr>
+        <p:txBody>
+          <a:bodyPr wrap="none" lIns="18288" rIns="18288" tIns="18288" bIns="18288" anchor="t">
+            <a:spAutoFit/>
+          </a:bodyPr>
+          <a:lstStyle/>
+          <a:p>
+            <a:pPr algn="l">
+              <a:spcAft>
+                <a:spcPts val="0"/>
+              </a:spcAft>
+            </a:pPr>
+            <a:r>
+              <a:rPr sz="1300" b="1" i="0">
+                <a:solidFill>
+                  <a:srgbClr val="E7F0F3"/>
+                </a:solidFill>
+                <a:latin typeface="Arial"/>
+              </a:rPr>
+              <a:t>Gₚ₀ = Γ  ⇒  p₀,crit = √(128 D_f Γ) / b²</a:t>
+            </a:r>
+          </a:p>
+        </p:txBody>
+      </p:sp>
+      <p:sp>
+        <p:nvSpPr>
+          <p:cNvPr id="44" name="C4-E21 text 42" descr="sci-ppt:o042"/>
+          <p:cNvSpPr txBox="1"/>
+          <p:nvPr/>
+        </p:nvSpPr>
+        <p:spPr>
+          <a:xfrm>
+            <a:off x="6995160" y="2651760"/>
+            <a:ext cx="4754880" cy="247142"/>
+          </a:xfrm>
+          <a:prstGeom prst="rect">
+            <a:avLst/>
+          </a:prstGeom>
+          <a:noFill/>
+          <a:effectLst/>
+        </p:spPr>
+        <p:txBody>
+          <a:bodyPr wrap="none" lIns="18288" rIns="18288" tIns="18288" bIns="18288" anchor="t">
+            <a:spAutoFit/>
+          </a:bodyPr>
+          <a:lstStyle/>
+          <a:p>
+            <a:pPr algn="l">
+              <a:spcAft>
+                <a:spcPts val="0"/>
+              </a:spcAft>
+            </a:pPr>
+            <a:r>
+              <a:rPr sz="1300" b="1" i="0">
+                <a:solidFill>
+                  <a:srgbClr val="F2B880"/>
+                </a:solidFill>
+                <a:latin typeface="Arial"/>
+              </a:rPr>
+              <a:t>G / Γ = (p₀ / p₀,crit)²</a:t>
+            </a:r>
+          </a:p>
+        </p:txBody>
+      </p:sp>
+      <p:sp>
+        <p:nvSpPr>
+          <p:cNvPr id="45" name="C4-E21 text 43" descr="sci-ppt:o043"/>
+          <p:cNvSpPr txBox="1"/>
+          <p:nvPr/>
+        </p:nvSpPr>
+        <p:spPr>
+          <a:xfrm>
+            <a:off x="7196328" y="3291840"/>
+            <a:ext cx="4553712" cy="231648"/>
+          </a:xfrm>
+          <a:prstGeom prst="rect">
+            <a:avLst/>
+          </a:prstGeom>
+          <a:noFill/>
+          <a:effectLst/>
+        </p:spPr>
+        <p:txBody>
+          <a:bodyPr wrap="none" lIns="18288" rIns="18288" tIns="18288" bIns="18288" anchor="t">
+            <a:spAutoFit/>
+          </a:bodyPr>
+          <a:lstStyle/>
+          <a:p>
+            <a:pPr algn="l">
+              <a:spcAft>
+                <a:spcPts val="0"/>
+              </a:spcAft>
+            </a:pPr>
+            <a:r>
+              <a:rPr sz="1200" b="0" i="0">
+                <a:solidFill>
+                  <a:srgbClr val="E7F0F3"/>
+                </a:solidFill>
+                <a:latin typeface="Arial"/>
+              </a:rPr>
+              <a:t>Doubling p₀ quadruples G.</a:t>
+            </a:r>
+          </a:p>
+        </p:txBody>
+      </p:sp>
+      <p:sp>
+        <p:nvSpPr>
+          <p:cNvPr id="46" name="C4-E21 ellipse 44" descr="sci-ppt:o044"/>
+          <p:cNvSpPr/>
+          <p:nvPr/>
+        </p:nvSpPr>
+        <p:spPr>
+          <a:xfrm>
+            <a:off x="7027164" y="3345180"/>
+            <a:ext cx="82296" cy="82296"/>
+          </a:xfrm>
+          <a:prstGeom prst="ellipse">
+            <a:avLst/>
+          </a:prstGeom>
+          <a:solidFill>
+            <a:srgbClr val="8EDBD4"/>
+          </a:solidFill>
+          <a:ln w="12700">
             <a:solidFill>
               <a:srgbClr val="8EDBD4"/>
             </a:solidFill>
           </a:ln>
           <a:effectLst/>
         </p:spPr>
-      </p:cxnSp>
-      <p:cxnSp>
-        <p:nvCxnSpPr>
-          <p:cNvPr id="39" name="C4-E21 line 37" descr="sci-ppt:o037"/>
-          <p:cNvCxnSpPr/>
+        <p:txBody>
+          <a:bodyPr rtlCol="0" anchor="ctr"/>
+          <a:lstStyle/>
+          <a:p>
+            <a:pPr algn="ctr"/>
+          </a:p>
+        </p:txBody>
+      </p:sp>
+      <p:sp>
+        <p:nvSpPr>
+          <p:cNvPr id="47" name="C4-E21 text 45" descr="sci-ppt:o045"/>
+          <p:cNvSpPr txBox="1"/>
           <p:nvPr/>
-        </p:nvCxnSpPr>
-        <p:spPr>
-          <a:xfrm flipV="1">
-            <a:off x="3686175" y="1356814"/>
-            <a:ext cx="76581" cy="17263"/>
-          </a:xfrm>
-          <a:prstGeom prst="line">
+        </p:nvSpPr>
+        <p:spPr>
+          <a:xfrm>
+            <a:off x="7196328" y="3569208"/>
+            <a:ext cx="4553712" cy="231648"/>
+          </a:xfrm>
+          <a:prstGeom prst="rect">
             <a:avLst/>
           </a:prstGeom>
-          <a:ln w="25400">
+          <a:noFill/>
+          <a:effectLst/>
+        </p:spPr>
+        <p:txBody>
+          <a:bodyPr wrap="none" lIns="18288" rIns="18288" tIns="18288" bIns="18288" anchor="t">
+            <a:spAutoFit/>
+          </a:bodyPr>
+          <a:lstStyle/>
+          <a:p>
+            <a:pPr algn="l">
+              <a:spcAft>
+                <a:spcPts val="0"/>
+              </a:spcAft>
+            </a:pPr>
+            <a:r>
+              <a:rPr sz="1200" b="0" i="0">
+                <a:solidFill>
+                  <a:srgbClr val="E7F0F3"/>
+                </a:solidFill>
+                <a:latin typeface="Arial"/>
+              </a:rPr>
+              <a:t>A bigger blister (b) lowers the pressure needed as 1/b².</a:t>
+            </a:r>
+          </a:p>
+        </p:txBody>
+      </p:sp>
+      <p:sp>
+        <p:nvSpPr>
+          <p:cNvPr id="48" name="C4-E21 ellipse 46" descr="sci-ppt:o046"/>
+          <p:cNvSpPr/>
+          <p:nvPr/>
+        </p:nvSpPr>
+        <p:spPr>
+          <a:xfrm>
+            <a:off x="7027164" y="3622548"/>
+            <a:ext cx="82296" cy="82296"/>
+          </a:xfrm>
+          <a:prstGeom prst="ellipse">
+            <a:avLst/>
+          </a:prstGeom>
+          <a:solidFill>
+            <a:srgbClr val="8EDBD4"/>
+          </a:solidFill>
+          <a:ln w="12700">
             <a:solidFill>
               <a:srgbClr val="8EDBD4"/>
             </a:solidFill>
           </a:ln>
           <a:effectLst/>
         </p:spPr>
-      </p:cxnSp>
-      <p:cxnSp>
-        <p:nvCxnSpPr>
-          <p:cNvPr id="40" name="C4-E21 line 38" descr="sci-ppt:o038"/>
-          <p:cNvCxnSpPr/>
-          <p:nvPr/>
-        </p:nvCxnSpPr>
-        <p:spPr>
-          <a:xfrm flipV="1">
-            <a:off x="3762756" y="1343318"/>
-            <a:ext cx="76581" cy="13496"/>
-          </a:xfrm>
-          <a:prstGeom prst="line">
-            <a:avLst/>
-          </a:prstGeom>
-          <a:ln w="25400">
-            <a:solidFill>
-              <a:srgbClr val="8EDBD4"/>
-            </a:solidFill>
-          </a:ln>
-          <a:effectLst/>
-        </p:spPr>
-      </p:cxnSp>
-      <p:cxnSp>
-        <p:nvCxnSpPr>
-          <p:cNvPr id="41" name="C4-E21 line 39" descr="sci-ppt:o039"/>
-          <p:cNvCxnSpPr/>
-          <p:nvPr/>
-        </p:nvCxnSpPr>
-        <p:spPr>
-          <a:xfrm flipV="1">
-            <a:off x="3839337" y="1333642"/>
-            <a:ext cx="76581" cy="9676"/>
-          </a:xfrm>
-          <a:prstGeom prst="line">
-            <a:avLst/>
-          </a:prstGeom>
-          <a:ln w="25400">
-            <a:solidFill>
-              <a:srgbClr val="8EDBD4"/>
-            </a:solidFill>
-          </a:ln>
-          <a:effectLst/>
-        </p:spPr>
-      </p:cxnSp>
-      <p:cxnSp>
-        <p:nvCxnSpPr>
-          <p:cNvPr id="42" name="C4-E21 line 40" descr="sci-ppt:o040"/>
-          <p:cNvCxnSpPr/>
-          <p:nvPr/>
-        </p:nvCxnSpPr>
-        <p:spPr>
-          <a:xfrm flipV="1">
-            <a:off x="3915918" y="1327822"/>
-            <a:ext cx="76581" cy="5820"/>
-          </a:xfrm>
-          <a:prstGeom prst="line">
-            <a:avLst/>
-          </a:prstGeom>
-          <a:ln w="25400">
-            <a:solidFill>
-              <a:srgbClr val="8EDBD4"/>
-            </a:solidFill>
-          </a:ln>
-          <a:effectLst/>
-        </p:spPr>
-      </p:cxnSp>
-      <p:cxnSp>
-        <p:nvCxnSpPr>
-          <p:cNvPr id="43" name="C4-E21 line 41" descr="sci-ppt:o041"/>
-          <p:cNvCxnSpPr/>
-          <p:nvPr/>
-        </p:nvCxnSpPr>
-        <p:spPr>
-          <a:xfrm flipV="1">
-            <a:off x="3992499" y="1325880"/>
-            <a:ext cx="76581" cy="1942"/>
-          </a:xfrm>
-          <a:prstGeom prst="line">
-            <a:avLst/>
-          </a:prstGeom>
-          <a:ln w="25400">
-            <a:solidFill>
-              <a:srgbClr val="8EDBD4"/>
-            </a:solidFill>
-          </a:ln>
-          <a:effectLst/>
-        </p:spPr>
-      </p:cxnSp>
-      <p:cxnSp>
-        <p:nvCxnSpPr>
-          <p:cNvPr id="44" name="C4-E21 line 42" descr="sci-ppt:o042"/>
-          <p:cNvCxnSpPr/>
-          <p:nvPr/>
-        </p:nvCxnSpPr>
-        <p:spPr>
-          <a:xfrm>
-            <a:off x="4069080" y="1325880"/>
-            <a:ext cx="76580" cy="1942"/>
-          </a:xfrm>
-          <a:prstGeom prst="line">
-            <a:avLst/>
-          </a:prstGeom>
-          <a:ln w="25400">
-            <a:solidFill>
-              <a:srgbClr val="8EDBD4"/>
-            </a:solidFill>
-          </a:ln>
-          <a:effectLst/>
-        </p:spPr>
-      </p:cxnSp>
-      <p:cxnSp>
-        <p:nvCxnSpPr>
-          <p:cNvPr id="45" name="C4-E21 line 43" descr="sci-ppt:o043"/>
-          <p:cNvCxnSpPr/>
-          <p:nvPr/>
-        </p:nvCxnSpPr>
-        <p:spPr>
-          <a:xfrm>
-            <a:off x="4145660" y="1327822"/>
-            <a:ext cx="76582" cy="5820"/>
-          </a:xfrm>
-          <a:prstGeom prst="line">
-            <a:avLst/>
-          </a:prstGeom>
-          <a:ln w="25400">
-            <a:solidFill>
-              <a:srgbClr val="8EDBD4"/>
-            </a:solidFill>
-          </a:ln>
-          <a:effectLst/>
-        </p:spPr>
-      </p:cxnSp>
-      <p:cxnSp>
-        <p:nvCxnSpPr>
-          <p:cNvPr id="46" name="C4-E21 line 44" descr="sci-ppt:o044"/>
-          <p:cNvCxnSpPr/>
-          <p:nvPr/>
-        </p:nvCxnSpPr>
-        <p:spPr>
-          <a:xfrm>
-            <a:off x="4222242" y="1333642"/>
-            <a:ext cx="76581" cy="9676"/>
-          </a:xfrm>
-          <a:prstGeom prst="line">
-            <a:avLst/>
-          </a:prstGeom>
-          <a:ln w="25400">
-            <a:solidFill>
-              <a:srgbClr val="8EDBD4"/>
-            </a:solidFill>
-          </a:ln>
-          <a:effectLst/>
-        </p:spPr>
-      </p:cxnSp>
-      <p:cxnSp>
-        <p:nvCxnSpPr>
-          <p:cNvPr id="47" name="C4-E21 line 45" descr="sci-ppt:o045"/>
-          <p:cNvCxnSpPr/>
-          <p:nvPr/>
-        </p:nvCxnSpPr>
-        <p:spPr>
-          <a:xfrm>
-            <a:off x="4298823" y="1343318"/>
-            <a:ext cx="76581" cy="13496"/>
-          </a:xfrm>
-          <a:prstGeom prst="line">
-            <a:avLst/>
-          </a:prstGeom>
-          <a:ln w="25400">
-            <a:solidFill>
-              <a:srgbClr val="8EDBD4"/>
-            </a:solidFill>
-          </a:ln>
-          <a:effectLst/>
-        </p:spPr>
-      </p:cxnSp>
-      <p:cxnSp>
-        <p:nvCxnSpPr>
-          <p:cNvPr id="48" name="C4-E21 line 46" descr="sci-ppt:o046"/>
-          <p:cNvCxnSpPr/>
-          <p:nvPr/>
-        </p:nvCxnSpPr>
-        <p:spPr>
-          <a:xfrm>
-            <a:off x="4375404" y="1356814"/>
-            <a:ext cx="76581" cy="17263"/>
-          </a:xfrm>
-          <a:prstGeom prst="line">
-            <a:avLst/>
-          </a:prstGeom>
-          <a:ln w="25400">
-            <a:solidFill>
-              <a:srgbClr val="8EDBD4"/>
-            </a:solidFill>
-          </a:ln>
-          <a:effectLst/>
-        </p:spPr>
-      </p:cxnSp>
-      <p:cxnSp>
-        <p:nvCxnSpPr>
-          <p:cNvPr id="49" name="C4-E21 line 47" descr="sci-ppt:o047"/>
-          <p:cNvCxnSpPr/>
-          <p:nvPr/>
-        </p:nvCxnSpPr>
-        <p:spPr>
-          <a:xfrm>
-            <a:off x="4451985" y="1374077"/>
-            <a:ext cx="76581" cy="20967"/>
-          </a:xfrm>
-          <a:prstGeom prst="line">
-            <a:avLst/>
-          </a:prstGeom>
-          <a:ln w="25400">
-            <a:solidFill>
-              <a:srgbClr val="8EDBD4"/>
-            </a:solidFill>
-          </a:ln>
-          <a:effectLst/>
-        </p:spPr>
-      </p:cxnSp>
-      <p:cxnSp>
-        <p:nvCxnSpPr>
-          <p:cNvPr id="50" name="C4-E21 line 48" descr="sci-ppt:o048"/>
-          <p:cNvCxnSpPr/>
-          <p:nvPr/>
-        </p:nvCxnSpPr>
-        <p:spPr>
-          <a:xfrm>
-            <a:off x="4528566" y="1395044"/>
-            <a:ext cx="76581" cy="24589"/>
-          </a:xfrm>
-          <a:prstGeom prst="line">
-            <a:avLst/>
-          </a:prstGeom>
-          <a:ln w="25400">
-            <a:solidFill>
-              <a:srgbClr val="8EDBD4"/>
-            </a:solidFill>
-          </a:ln>
-          <a:effectLst/>
-        </p:spPr>
-      </p:cxnSp>
-      <p:cxnSp>
-        <p:nvCxnSpPr>
-          <p:cNvPr id="51" name="C4-E21 line 49" descr="sci-ppt:o049"/>
-          <p:cNvCxnSpPr/>
-          <p:nvPr/>
-        </p:nvCxnSpPr>
-        <p:spPr>
-          <a:xfrm>
-            <a:off x="4605147" y="1419633"/>
-            <a:ext cx="76581" cy="28118"/>
-          </a:xfrm>
-          <a:prstGeom prst="line">
-            <a:avLst/>
-          </a:prstGeom>
-          <a:ln w="25400">
-            <a:solidFill>
-              <a:srgbClr val="8EDBD4"/>
-            </a:solidFill>
-          </a:ln>
-          <a:effectLst/>
-        </p:spPr>
-      </p:cxnSp>
-      <p:cxnSp>
-        <p:nvCxnSpPr>
-          <p:cNvPr id="52" name="C4-E21 line 50" descr="sci-ppt:o050"/>
-          <p:cNvCxnSpPr/>
-          <p:nvPr/>
-        </p:nvCxnSpPr>
-        <p:spPr>
-          <a:xfrm>
-            <a:off x="4681728" y="1447751"/>
-            <a:ext cx="76580" cy="31536"/>
-          </a:xfrm>
-          <a:prstGeom prst="line">
-            <a:avLst/>
-          </a:prstGeom>
-          <a:ln w="25400">
-            <a:solidFill>
-              <a:srgbClr val="8EDBD4"/>
-            </a:solidFill>
-          </a:ln>
-          <a:effectLst/>
-        </p:spPr>
-      </p:cxnSp>
-      <p:cxnSp>
-        <p:nvCxnSpPr>
-          <p:cNvPr id="53" name="C4-E21 line 51" descr="sci-ppt:o051"/>
-          <p:cNvCxnSpPr/>
-          <p:nvPr/>
-        </p:nvCxnSpPr>
-        <p:spPr>
-          <a:xfrm>
-            <a:off x="4758308" y="1479287"/>
-            <a:ext cx="76582" cy="34830"/>
-          </a:xfrm>
-          <a:prstGeom prst="line">
-            <a:avLst/>
-          </a:prstGeom>
-          <a:ln w="25400">
-            <a:solidFill>
-              <a:srgbClr val="8EDBD4"/>
-            </a:solidFill>
-          </a:ln>
-          <a:effectLst/>
-        </p:spPr>
-      </p:cxnSp>
-      <p:cxnSp>
-        <p:nvCxnSpPr>
-          <p:cNvPr id="54" name="C4-E21 line 52" descr="sci-ppt:o052"/>
-          <p:cNvCxnSpPr/>
-          <p:nvPr/>
-        </p:nvCxnSpPr>
-        <p:spPr>
-          <a:xfrm>
-            <a:off x="4834890" y="1514117"/>
-            <a:ext cx="76581" cy="37987"/>
-          </a:xfrm>
-          <a:prstGeom prst="line">
-            <a:avLst/>
-          </a:prstGeom>
-          <a:ln w="25400">
-            <a:solidFill>
-              <a:srgbClr val="8EDBD4"/>
-            </a:solidFill>
-          </a:ln>
-          <a:effectLst/>
-        </p:spPr>
-      </p:cxnSp>
-      <p:cxnSp>
-        <p:nvCxnSpPr>
-          <p:cNvPr id="55" name="C4-E21 line 53" descr="sci-ppt:o053"/>
-          <p:cNvCxnSpPr/>
-          <p:nvPr/>
-        </p:nvCxnSpPr>
-        <p:spPr>
-          <a:xfrm>
-            <a:off x="4911471" y="1552104"/>
-            <a:ext cx="76581" cy="40991"/>
-          </a:xfrm>
-          <a:prstGeom prst="line">
-            <a:avLst/>
-          </a:prstGeom>
-          <a:ln w="25400">
-            <a:solidFill>
-              <a:srgbClr val="8EDBD4"/>
-            </a:solidFill>
-          </a:ln>
-          <a:effectLst/>
-        </p:spPr>
-      </p:cxnSp>
-      <p:cxnSp>
-        <p:nvCxnSpPr>
-          <p:cNvPr id="56" name="C4-E21 line 54" descr="sci-ppt:o054"/>
-          <p:cNvCxnSpPr/>
-          <p:nvPr/>
-        </p:nvCxnSpPr>
-        <p:spPr>
-          <a:xfrm>
-            <a:off x="4988052" y="1593095"/>
-            <a:ext cx="76581" cy="43826"/>
-          </a:xfrm>
-          <a:prstGeom prst="line">
-            <a:avLst/>
-          </a:prstGeom>
-          <a:ln w="25400">
-            <a:solidFill>
-              <a:srgbClr val="8EDBD4"/>
-            </a:solidFill>
-          </a:ln>
-          <a:effectLst/>
-        </p:spPr>
-      </p:cxnSp>
-      <p:cxnSp>
-        <p:nvCxnSpPr>
-          <p:cNvPr id="57" name="C4-E21 line 55" descr="sci-ppt:o055"/>
-          <p:cNvCxnSpPr/>
-          <p:nvPr/>
-        </p:nvCxnSpPr>
-        <p:spPr>
-          <a:xfrm>
-            <a:off x="5064633" y="1636921"/>
-            <a:ext cx="76581" cy="46479"/>
-          </a:xfrm>
-          <a:prstGeom prst="line">
-            <a:avLst/>
-          </a:prstGeom>
-          <a:ln w="25400">
-            <a:solidFill>
-              <a:srgbClr val="8EDBD4"/>
-            </a:solidFill>
-          </a:ln>
-          <a:effectLst/>
-        </p:spPr>
-      </p:cxnSp>
-      <p:cxnSp>
-        <p:nvCxnSpPr>
-          <p:cNvPr id="58" name="C4-E21 line 56" descr="sci-ppt:o056"/>
-          <p:cNvCxnSpPr/>
-          <p:nvPr/>
-        </p:nvCxnSpPr>
-        <p:spPr>
-          <a:xfrm>
-            <a:off x="5141214" y="1683400"/>
-            <a:ext cx="76581" cy="48937"/>
-          </a:xfrm>
-          <a:prstGeom prst="line">
-            <a:avLst/>
-          </a:prstGeom>
-          <a:ln w="25400">
-            <a:solidFill>
-              <a:srgbClr val="8EDBD4"/>
-            </a:solidFill>
-          </a:ln>
-          <a:effectLst/>
-        </p:spPr>
-      </p:cxnSp>
-      <p:cxnSp>
-        <p:nvCxnSpPr>
-          <p:cNvPr id="59" name="C4-E21 line 57" descr="sci-ppt:o057"/>
-          <p:cNvCxnSpPr/>
-          <p:nvPr/>
-        </p:nvCxnSpPr>
-        <p:spPr>
-          <a:xfrm>
-            <a:off x="5217795" y="1732337"/>
-            <a:ext cx="76580" cy="51181"/>
-          </a:xfrm>
-          <a:prstGeom prst="line">
-            <a:avLst/>
-          </a:prstGeom>
-          <a:ln w="25400">
-            <a:solidFill>
-              <a:srgbClr val="8EDBD4"/>
-            </a:solidFill>
-          </a:ln>
-          <a:effectLst/>
-        </p:spPr>
-      </p:cxnSp>
-      <p:cxnSp>
-        <p:nvCxnSpPr>
-          <p:cNvPr id="60" name="C4-E21 line 58" descr="sci-ppt:o058"/>
-          <p:cNvCxnSpPr/>
-          <p:nvPr/>
-        </p:nvCxnSpPr>
-        <p:spPr>
-          <a:xfrm>
-            <a:off x="5294375" y="1783518"/>
-            <a:ext cx="76582" cy="53202"/>
-          </a:xfrm>
-          <a:prstGeom prst="line">
-            <a:avLst/>
-          </a:prstGeom>
-          <a:ln w="25400">
-            <a:solidFill>
-              <a:srgbClr val="8EDBD4"/>
-            </a:solidFill>
-          </a:ln>
-          <a:effectLst/>
-        </p:spPr>
-      </p:cxnSp>
-      <p:cxnSp>
-        <p:nvCxnSpPr>
-          <p:cNvPr id="61" name="C4-E21 line 59" descr="sci-ppt:o059"/>
-          <p:cNvCxnSpPr/>
-          <p:nvPr/>
-        </p:nvCxnSpPr>
-        <p:spPr>
-          <a:xfrm>
-            <a:off x="5370957" y="1836720"/>
-            <a:ext cx="76581" cy="54981"/>
-          </a:xfrm>
-          <a:prstGeom prst="line">
-            <a:avLst/>
-          </a:prstGeom>
-          <a:ln w="25400">
-            <a:solidFill>
-              <a:srgbClr val="8EDBD4"/>
-            </a:solidFill>
-          </a:ln>
-          <a:effectLst/>
-        </p:spPr>
-      </p:cxnSp>
-      <p:cxnSp>
-        <p:nvCxnSpPr>
-          <p:cNvPr id="62" name="C4-E21 line 60" descr="sci-ppt:o060"/>
-          <p:cNvCxnSpPr/>
-          <p:nvPr/>
-        </p:nvCxnSpPr>
-        <p:spPr>
-          <a:xfrm>
-            <a:off x="5447538" y="1891701"/>
-            <a:ext cx="76581" cy="56504"/>
-          </a:xfrm>
-          <a:prstGeom prst="line">
-            <a:avLst/>
-          </a:prstGeom>
-          <a:ln w="25400">
-            <a:solidFill>
-              <a:srgbClr val="8EDBD4"/>
-            </a:solidFill>
-          </a:ln>
-          <a:effectLst/>
-        </p:spPr>
-      </p:cxnSp>
-      <p:cxnSp>
-        <p:nvCxnSpPr>
-          <p:cNvPr id="63" name="C4-E21 line 61" descr="sci-ppt:o061"/>
-          <p:cNvCxnSpPr/>
-          <p:nvPr/>
-        </p:nvCxnSpPr>
-        <p:spPr>
-          <a:xfrm>
-            <a:off x="5524119" y="1948205"/>
-            <a:ext cx="76581" cy="57760"/>
-          </a:xfrm>
-          <a:prstGeom prst="line">
-            <a:avLst/>
-          </a:prstGeom>
-          <a:ln w="25400">
-            <a:solidFill>
-              <a:srgbClr val="8EDBD4"/>
-            </a:solidFill>
-          </a:ln>
-          <a:effectLst/>
-        </p:spPr>
-      </p:cxnSp>
-      <p:cxnSp>
-        <p:nvCxnSpPr>
-          <p:cNvPr id="64" name="C4-E21 line 62" descr="sci-ppt:o062"/>
-          <p:cNvCxnSpPr/>
-          <p:nvPr/>
-        </p:nvCxnSpPr>
-        <p:spPr>
-          <a:xfrm>
-            <a:off x="5600700" y="2005965"/>
-            <a:ext cx="76581" cy="58729"/>
-          </a:xfrm>
-          <a:prstGeom prst="line">
-            <a:avLst/>
-          </a:prstGeom>
-          <a:ln w="25400">
-            <a:solidFill>
-              <a:srgbClr val="8EDBD4"/>
-            </a:solidFill>
-          </a:ln>
-          <a:effectLst/>
-        </p:spPr>
-      </p:cxnSp>
-      <p:cxnSp>
-        <p:nvCxnSpPr>
-          <p:cNvPr id="65" name="C4-E21 line 63" descr="sci-ppt:o063"/>
-          <p:cNvCxnSpPr/>
-          <p:nvPr/>
-        </p:nvCxnSpPr>
-        <p:spPr>
-          <a:xfrm>
-            <a:off x="5677281" y="2064694"/>
-            <a:ext cx="76581" cy="59401"/>
-          </a:xfrm>
-          <a:prstGeom prst="line">
-            <a:avLst/>
-          </a:prstGeom>
-          <a:ln w="25400">
-            <a:solidFill>
-              <a:srgbClr val="8EDBD4"/>
-            </a:solidFill>
-          </a:ln>
-          <a:effectLst/>
-        </p:spPr>
-      </p:cxnSp>
-      <p:cxnSp>
-        <p:nvCxnSpPr>
-          <p:cNvPr id="66" name="C4-E21 line 64" descr="sci-ppt:o064"/>
-          <p:cNvCxnSpPr/>
-          <p:nvPr/>
-        </p:nvCxnSpPr>
-        <p:spPr>
-          <a:xfrm>
-            <a:off x="5753862" y="2124095"/>
-            <a:ext cx="76581" cy="59760"/>
-          </a:xfrm>
-          <a:prstGeom prst="line">
-            <a:avLst/>
-          </a:prstGeom>
-          <a:ln w="25400">
-            <a:solidFill>
-              <a:srgbClr val="8EDBD4"/>
-            </a:solidFill>
-          </a:ln>
-          <a:effectLst/>
-        </p:spPr>
-      </p:cxnSp>
-      <p:cxnSp>
-        <p:nvCxnSpPr>
-          <p:cNvPr id="67" name="C4-E21 line 65" descr="sci-ppt:o065"/>
-          <p:cNvCxnSpPr/>
-          <p:nvPr/>
-        </p:nvCxnSpPr>
-        <p:spPr>
-          <a:xfrm>
-            <a:off x="5830443" y="2183855"/>
-            <a:ext cx="76581" cy="59789"/>
-          </a:xfrm>
-          <a:prstGeom prst="line">
-            <a:avLst/>
-          </a:prstGeom>
-          <a:ln w="25400">
-            <a:solidFill>
-              <a:srgbClr val="8EDBD4"/>
-            </a:solidFill>
-          </a:ln>
-          <a:effectLst/>
-        </p:spPr>
-      </p:cxnSp>
-      <p:cxnSp>
-        <p:nvCxnSpPr>
-          <p:cNvPr id="68" name="C4-E21 line 66" descr="sci-ppt:o066"/>
-          <p:cNvCxnSpPr/>
-          <p:nvPr/>
-        </p:nvCxnSpPr>
-        <p:spPr>
-          <a:xfrm>
-            <a:off x="5907024" y="2243644"/>
-            <a:ext cx="76580" cy="59478"/>
-          </a:xfrm>
-          <a:prstGeom prst="line">
-            <a:avLst/>
-          </a:prstGeom>
-          <a:ln w="25400">
-            <a:solidFill>
-              <a:srgbClr val="8EDBD4"/>
-            </a:solidFill>
-          </a:ln>
-          <a:effectLst/>
-        </p:spPr>
-      </p:cxnSp>
-      <p:cxnSp>
-        <p:nvCxnSpPr>
-          <p:cNvPr id="69" name="C4-E21 line 67" descr="sci-ppt:o067"/>
-          <p:cNvCxnSpPr/>
-          <p:nvPr/>
-        </p:nvCxnSpPr>
-        <p:spPr>
-          <a:xfrm>
-            <a:off x="5983604" y="2303122"/>
-            <a:ext cx="76582" cy="58809"/>
-          </a:xfrm>
-          <a:prstGeom prst="line">
-            <a:avLst/>
-          </a:prstGeom>
-          <a:ln w="25400">
-            <a:solidFill>
-              <a:srgbClr val="8EDBD4"/>
-            </a:solidFill>
-          </a:ln>
-          <a:effectLst/>
-        </p:spPr>
-      </p:cxnSp>
-      <p:cxnSp>
-        <p:nvCxnSpPr>
-          <p:cNvPr id="70" name="C4-E21 line 68" descr="sci-ppt:o068"/>
-          <p:cNvCxnSpPr/>
-          <p:nvPr/>
-        </p:nvCxnSpPr>
-        <p:spPr>
-          <a:xfrm>
-            <a:off x="6060186" y="2361931"/>
-            <a:ext cx="76581" cy="57767"/>
-          </a:xfrm>
-          <a:prstGeom prst="line">
-            <a:avLst/>
-          </a:prstGeom>
-          <a:ln w="25400">
-            <a:solidFill>
-              <a:srgbClr val="8EDBD4"/>
-            </a:solidFill>
-          </a:ln>
-          <a:effectLst/>
-        </p:spPr>
-      </p:cxnSp>
-      <p:cxnSp>
-        <p:nvCxnSpPr>
-          <p:cNvPr id="71" name="C4-E21 line 69" descr="sci-ppt:o069"/>
-          <p:cNvCxnSpPr/>
-          <p:nvPr/>
-        </p:nvCxnSpPr>
-        <p:spPr>
-          <a:xfrm>
-            <a:off x="6136767" y="2419698"/>
-            <a:ext cx="76581" cy="56341"/>
-          </a:xfrm>
-          <a:prstGeom prst="line">
-            <a:avLst/>
-          </a:prstGeom>
-          <a:ln w="25400">
-            <a:solidFill>
-              <a:srgbClr val="8EDBD4"/>
-            </a:solidFill>
-          </a:ln>
-          <a:effectLst/>
-        </p:spPr>
-      </p:cxnSp>
-      <p:cxnSp>
-        <p:nvCxnSpPr>
-          <p:cNvPr id="72" name="C4-E21 line 70" descr="sci-ppt:o070"/>
-          <p:cNvCxnSpPr/>
-          <p:nvPr/>
-        </p:nvCxnSpPr>
-        <p:spPr>
-          <a:xfrm>
-            <a:off x="6213348" y="2476039"/>
-            <a:ext cx="76581" cy="54513"/>
-          </a:xfrm>
-          <a:prstGeom prst="line">
-            <a:avLst/>
-          </a:prstGeom>
-          <a:ln w="25400">
-            <a:solidFill>
-              <a:srgbClr val="8EDBD4"/>
-            </a:solidFill>
-          </a:ln>
-          <a:effectLst/>
-        </p:spPr>
-      </p:cxnSp>
-      <p:cxnSp>
-        <p:nvCxnSpPr>
-          <p:cNvPr id="73" name="C4-E21 line 71" descr="sci-ppt:o071"/>
-          <p:cNvCxnSpPr/>
-          <p:nvPr/>
-        </p:nvCxnSpPr>
-        <p:spPr>
-          <a:xfrm>
-            <a:off x="6289929" y="2530552"/>
-            <a:ext cx="76581" cy="52270"/>
-          </a:xfrm>
-          <a:prstGeom prst="line">
-            <a:avLst/>
-          </a:prstGeom>
-          <a:ln w="25400">
-            <a:solidFill>
-              <a:srgbClr val="8EDBD4"/>
-            </a:solidFill>
-          </a:ln>
-          <a:effectLst/>
-        </p:spPr>
-      </p:cxnSp>
-      <p:cxnSp>
-        <p:nvCxnSpPr>
-          <p:cNvPr id="74" name="C4-E21 line 72" descr="sci-ppt:o072"/>
-          <p:cNvCxnSpPr/>
-          <p:nvPr/>
-        </p:nvCxnSpPr>
-        <p:spPr>
-          <a:xfrm>
-            <a:off x="6366510" y="2582822"/>
-            <a:ext cx="76581" cy="49597"/>
-          </a:xfrm>
-          <a:prstGeom prst="line">
-            <a:avLst/>
-          </a:prstGeom>
-          <a:ln w="25400">
-            <a:solidFill>
-              <a:srgbClr val="8EDBD4"/>
-            </a:solidFill>
-          </a:ln>
-          <a:effectLst/>
-        </p:spPr>
-      </p:cxnSp>
-      <p:cxnSp>
-        <p:nvCxnSpPr>
-          <p:cNvPr id="75" name="C4-E21 line 73" descr="sci-ppt:o073"/>
-          <p:cNvCxnSpPr/>
-          <p:nvPr/>
-        </p:nvCxnSpPr>
-        <p:spPr>
-          <a:xfrm>
-            <a:off x="6443091" y="2632419"/>
-            <a:ext cx="76581" cy="46480"/>
-          </a:xfrm>
-          <a:prstGeom prst="line">
-            <a:avLst/>
-          </a:prstGeom>
-          <a:ln w="25400">
-            <a:solidFill>
-              <a:srgbClr val="8EDBD4"/>
-            </a:solidFill>
-          </a:ln>
-          <a:effectLst/>
-        </p:spPr>
-      </p:cxnSp>
-      <p:cxnSp>
-        <p:nvCxnSpPr>
-          <p:cNvPr id="76" name="C4-E21 line 74" descr="sci-ppt:o074"/>
-          <p:cNvCxnSpPr/>
-          <p:nvPr/>
-        </p:nvCxnSpPr>
-        <p:spPr>
-          <a:xfrm>
-            <a:off x="6519672" y="2678899"/>
-            <a:ext cx="76581" cy="42903"/>
-          </a:xfrm>
-          <a:prstGeom prst="line">
-            <a:avLst/>
-          </a:prstGeom>
-          <a:ln w="25400">
-            <a:solidFill>
-              <a:srgbClr val="8EDBD4"/>
-            </a:solidFill>
-          </a:ln>
-          <a:effectLst/>
-        </p:spPr>
-      </p:cxnSp>
-      <p:cxnSp>
-        <p:nvCxnSpPr>
-          <p:cNvPr id="77" name="C4-E21 line 75" descr="sci-ppt:o075"/>
-          <p:cNvCxnSpPr/>
-          <p:nvPr/>
-        </p:nvCxnSpPr>
-        <p:spPr>
-          <a:xfrm>
-            <a:off x="6596253" y="2721802"/>
-            <a:ext cx="76580" cy="38853"/>
-          </a:xfrm>
-          <a:prstGeom prst="line">
-            <a:avLst/>
-          </a:prstGeom>
-          <a:ln w="25400">
-            <a:solidFill>
-              <a:srgbClr val="8EDBD4"/>
-            </a:solidFill>
-          </a:ln>
-          <a:effectLst/>
-        </p:spPr>
-      </p:cxnSp>
-      <p:cxnSp>
-        <p:nvCxnSpPr>
-          <p:cNvPr id="78" name="C4-E21 line 76" descr="sci-ppt:o076"/>
-          <p:cNvCxnSpPr/>
-          <p:nvPr/>
-        </p:nvCxnSpPr>
-        <p:spPr>
-          <a:xfrm>
-            <a:off x="6672833" y="2760655"/>
-            <a:ext cx="76582" cy="34314"/>
-          </a:xfrm>
-          <a:prstGeom prst="line">
-            <a:avLst/>
-          </a:prstGeom>
-          <a:ln w="25400">
-            <a:solidFill>
-              <a:srgbClr val="8EDBD4"/>
-            </a:solidFill>
-          </a:ln>
-          <a:effectLst/>
-        </p:spPr>
-      </p:cxnSp>
-      <p:cxnSp>
-        <p:nvCxnSpPr>
-          <p:cNvPr id="79" name="C4-E21 line 77" descr="sci-ppt:o077"/>
-          <p:cNvCxnSpPr/>
-          <p:nvPr/>
-        </p:nvCxnSpPr>
-        <p:spPr>
-          <a:xfrm>
-            <a:off x="6749415" y="2794969"/>
-            <a:ext cx="76581" cy="29274"/>
-          </a:xfrm>
-          <a:prstGeom prst="line">
-            <a:avLst/>
-          </a:prstGeom>
-          <a:ln w="25400">
-            <a:solidFill>
-              <a:srgbClr val="8EDBD4"/>
-            </a:solidFill>
-          </a:ln>
-          <a:effectLst/>
-        </p:spPr>
-      </p:cxnSp>
-      <p:cxnSp>
-        <p:nvCxnSpPr>
-          <p:cNvPr id="80" name="C4-E21 line 78" descr="sci-ppt:o078"/>
-          <p:cNvCxnSpPr/>
-          <p:nvPr/>
-        </p:nvCxnSpPr>
-        <p:spPr>
-          <a:xfrm>
-            <a:off x="6825996" y="2824243"/>
-            <a:ext cx="76581" cy="23715"/>
-          </a:xfrm>
-          <a:prstGeom prst="line">
-            <a:avLst/>
-          </a:prstGeom>
-          <a:ln w="25400">
-            <a:solidFill>
-              <a:srgbClr val="8EDBD4"/>
-            </a:solidFill>
-          </a:ln>
-          <a:effectLst/>
-        </p:spPr>
-      </p:cxnSp>
-      <p:cxnSp>
-        <p:nvCxnSpPr>
-          <p:cNvPr id="81" name="C4-E21 line 79" descr="sci-ppt:o079"/>
-          <p:cNvCxnSpPr/>
-          <p:nvPr/>
-        </p:nvCxnSpPr>
-        <p:spPr>
-          <a:xfrm>
-            <a:off x="6902577" y="2847958"/>
-            <a:ext cx="76581" cy="17624"/>
-          </a:xfrm>
-          <a:prstGeom prst="line">
-            <a:avLst/>
-          </a:prstGeom>
-          <a:ln w="25400">
-            <a:solidFill>
-              <a:srgbClr val="8EDBD4"/>
-            </a:solidFill>
-          </a:ln>
-          <a:effectLst/>
-        </p:spPr>
-      </p:cxnSp>
-      <p:cxnSp>
-        <p:nvCxnSpPr>
-          <p:cNvPr id="82" name="C4-E21 line 80" descr="sci-ppt:o080"/>
-          <p:cNvCxnSpPr/>
-          <p:nvPr/>
-        </p:nvCxnSpPr>
-        <p:spPr>
-          <a:xfrm>
-            <a:off x="6979158" y="2865582"/>
-            <a:ext cx="76581" cy="10988"/>
-          </a:xfrm>
-          <a:prstGeom prst="line">
-            <a:avLst/>
-          </a:prstGeom>
-          <a:ln w="25400">
-            <a:solidFill>
-              <a:srgbClr val="8EDBD4"/>
-            </a:solidFill>
-          </a:ln>
-          <a:effectLst/>
-        </p:spPr>
-      </p:cxnSp>
-      <p:cxnSp>
-        <p:nvCxnSpPr>
-          <p:cNvPr id="83" name="C4-E21 line 81" descr="sci-ppt:o081"/>
-          <p:cNvCxnSpPr/>
-          <p:nvPr/>
-        </p:nvCxnSpPr>
-        <p:spPr>
-          <a:xfrm>
-            <a:off x="7055739" y="2876570"/>
-            <a:ext cx="76581" cy="3790"/>
-          </a:xfrm>
-          <a:prstGeom prst="line">
-            <a:avLst/>
-          </a:prstGeom>
-          <a:ln w="25400">
-            <a:solidFill>
-              <a:srgbClr val="8EDBD4"/>
-            </a:solidFill>
-          </a:ln>
-          <a:effectLst/>
-        </p:spPr>
-      </p:cxnSp>
-      <p:sp>
-        <p:nvSpPr>
-          <p:cNvPr id="84" name="C4-E21 rect 82" descr="sci-ppt:o082"/>
-          <p:cNvSpPr/>
-          <p:nvPr/>
-        </p:nvSpPr>
-        <p:spPr>
-          <a:xfrm>
-            <a:off x="777240" y="2651760"/>
-            <a:ext cx="274320" cy="457200"/>
-          </a:xfrm>
-          <a:prstGeom prst="rect">
-            <a:avLst/>
-          </a:prstGeom>
-          <a:solidFill>
-            <a:srgbClr val="213E4B"/>
-          </a:solidFill>
-          <a:ln w="19050">
-            <a:solidFill>
-              <a:srgbClr val="B4C7D2"/>
-            </a:solidFill>
-          </a:ln>
-          <a:effectLst/>
-        </p:spPr>
         <p:txBody>
           <a:bodyPr rtlCol="0" anchor="ctr"/>
           <a:lstStyle/>
@@ -4952,70 +4832,14 @@
       </p:sp>
       <p:sp>
         <p:nvSpPr>
-          <p:cNvPr id="85" name="C4-E21 rect 83" descr="sci-ppt:o083"/>
-          <p:cNvSpPr/>
-          <p:nvPr/>
-        </p:nvSpPr>
-        <p:spPr>
-          <a:xfrm>
-            <a:off x="7086600" y="2651760"/>
-            <a:ext cx="274320" cy="457200"/>
-          </a:xfrm>
-          <a:prstGeom prst="rect">
-            <a:avLst/>
-          </a:prstGeom>
-          <a:solidFill>
-            <a:srgbClr val="213E4B"/>
-          </a:solidFill>
-          <a:ln w="19050">
-            <a:solidFill>
-              <a:srgbClr val="B4C7D2"/>
-            </a:solidFill>
-          </a:ln>
-          <a:effectLst/>
-        </p:spPr>
-        <p:txBody>
-          <a:bodyPr rtlCol="0" anchor="ctr"/>
-          <a:lstStyle/>
-          <a:p>
-            <a:pPr algn="ctr"/>
-          </a:p>
-        </p:txBody>
-      </p:sp>
-      <p:cxnSp>
-        <p:nvCxnSpPr>
-          <p:cNvPr id="86" name="C4-E21 arrow 84" descr="sci-ppt:o084"/>
-          <p:cNvCxnSpPr/>
-          <p:nvPr/>
-        </p:nvCxnSpPr>
-        <p:spPr>
-          <a:xfrm flipV="1">
-            <a:off x="4069080" y="1371600"/>
-            <a:ext cx="0" cy="1463040"/>
-          </a:xfrm>
-          <a:prstGeom prst="line">
-            <a:avLst/>
-          </a:prstGeom>
-          <a:ln w="25400">
-            <a:solidFill>
-              <a:srgbClr val="8EDBD4"/>
-            </a:solidFill>
-            <a:headEnd type="none" w="med" len="med"/>
-            <a:tailEnd type="triangle" w="med" len="med"/>
-          </a:ln>
-          <a:effectLst/>
-        </p:spPr>
-      </p:cxnSp>
-      <p:sp>
-        <p:nvSpPr>
-          <p:cNvPr id="87" name="C4-E21 text 85" descr="sci-ppt:o085"/>
+          <p:cNvPr id="49" name="C4-E21 text 47" descr="sci-ppt:o047"/>
           <p:cNvSpPr txBox="1"/>
           <p:nvPr/>
         </p:nvSpPr>
         <p:spPr>
           <a:xfrm>
-            <a:off x="4206240" y="1920240"/>
-            <a:ext cx="2560320" cy="411480"/>
+            <a:off x="914400" y="5486400"/>
+            <a:ext cx="10972800" cy="239395"/>
           </a:xfrm>
           <a:prstGeom prst="rect">
             <a:avLst/>
@@ -5024,7 +4848,7 @@
           <a:effectLst/>
         </p:spPr>
         <p:txBody>
-          <a:bodyPr wrap="square" lIns="27432" rIns="27432" tIns="18288" bIns="18288" anchor="ctr">
+          <a:bodyPr wrap="none" lIns="18288" rIns="18288" tIns="18288" bIns="18288" anchor="t">
             <a:spAutoFit/>
           </a:bodyPr>
           <a:lstStyle/>
@@ -5035,99 +4859,27 @@
               </a:spcAft>
             </a:pPr>
             <a:r>
-              <a:rPr sz="1800" b="0" i="0">
+              <a:rPr sz="1250" b="0" i="0">
                 <a:solidFill>
                   <a:srgbClr val="E7F0F3"/>
                 </a:solidFill>
                 <a:latin typeface="Arial"/>
               </a:rPr>
-              <a:t>w(r) ↑</a:t>
-            </a:r>
-          </a:p>
-        </p:txBody>
-      </p:sp>
-      <p:cxnSp>
-        <p:nvCxnSpPr>
-          <p:cNvPr id="88" name="C4-E21 arrow 86" descr="sci-ppt:o086"/>
-          <p:cNvCxnSpPr/>
-          <p:nvPr/>
-        </p:nvCxnSpPr>
-        <p:spPr>
-          <a:xfrm flipV="1">
-            <a:off x="2286000" y="2971800"/>
-            <a:ext cx="0" cy="594360"/>
-          </a:xfrm>
-          <a:prstGeom prst="line">
-            <a:avLst/>
-          </a:prstGeom>
-          <a:ln w="25400">
-            <a:solidFill>
-              <a:srgbClr val="8EDBD4"/>
-            </a:solidFill>
-            <a:headEnd type="none" w="med" len="med"/>
-            <a:tailEnd type="triangle" w="med" len="med"/>
-          </a:ln>
-          <a:effectLst/>
-        </p:spPr>
-      </p:cxnSp>
-      <p:cxnSp>
-        <p:nvCxnSpPr>
-          <p:cNvPr id="89" name="C4-E21 arrow 87" descr="sci-ppt:o087"/>
-          <p:cNvCxnSpPr/>
-          <p:nvPr/>
-        </p:nvCxnSpPr>
-        <p:spPr>
-          <a:xfrm flipV="1">
-            <a:off x="4069080" y="2971800"/>
-            <a:ext cx="0" cy="594360"/>
-          </a:xfrm>
-          <a:prstGeom prst="line">
-            <a:avLst/>
-          </a:prstGeom>
-          <a:ln w="25400">
-            <a:solidFill>
-              <a:srgbClr val="8EDBD4"/>
-            </a:solidFill>
-            <a:headEnd type="none" w="med" len="med"/>
-            <a:tailEnd type="triangle" w="med" len="med"/>
-          </a:ln>
-          <a:effectLst/>
-        </p:spPr>
-      </p:cxnSp>
-      <p:cxnSp>
-        <p:nvCxnSpPr>
-          <p:cNvPr id="90" name="C4-E21 arrow 88" descr="sci-ppt:o088"/>
-          <p:cNvCxnSpPr/>
-          <p:nvPr/>
-        </p:nvCxnSpPr>
-        <p:spPr>
-          <a:xfrm flipV="1">
-            <a:off x="5852160" y="2971800"/>
-            <a:ext cx="0" cy="594360"/>
-          </a:xfrm>
-          <a:prstGeom prst="line">
-            <a:avLst/>
-          </a:prstGeom>
-          <a:ln w="25400">
-            <a:solidFill>
-              <a:srgbClr val="8EDBD4"/>
-            </a:solidFill>
-            <a:headEnd type="none" w="med" len="med"/>
-            <a:tailEnd type="triangle" w="med" len="med"/>
-          </a:ln>
-          <a:effectLst/>
-        </p:spPr>
-      </p:cxnSp>
-      <p:sp>
-        <p:nvSpPr>
-          <p:cNvPr id="91" name="C4-E21 text 89" descr="sci-ppt:o089"/>
+              <a:t>The threshold depends on geometry and fracture resistance, not on pressure alone: a pressure peak without b and Γ says nothing.</a:t>
+            </a:r>
+          </a:p>
+        </p:txBody>
+      </p:sp>
+      <p:sp>
+        <p:nvSpPr>
+          <p:cNvPr id="50" name="C4-E21 text 48" descr="sci-ppt:o048"/>
           <p:cNvSpPr txBox="1"/>
           <p:nvPr/>
         </p:nvSpPr>
         <p:spPr>
           <a:xfrm>
-            <a:off x="2834640" y="3611880"/>
-            <a:ext cx="3657600" cy="274320"/>
+            <a:off x="320040" y="6510528"/>
+            <a:ext cx="11521440" cy="200660"/>
           </a:xfrm>
           <a:prstGeom prst="rect">
             <a:avLst/>
@@ -5136,545 +4888,7 @@
           <a:effectLst/>
         </p:spPr>
         <p:txBody>
-          <a:bodyPr wrap="square" lIns="27432" rIns="27432" tIns="18288" bIns="18288" anchor="ctr">
-            <a:spAutoFit/>
-          </a:bodyPr>
-          <a:lstStyle/>
-          <a:p>
-            <a:pPr algn="l">
-              <a:spcAft>
-                <a:spcPts val="0"/>
-              </a:spcAft>
-            </a:pPr>
-            <a:r>
-              <a:rPr sz="1600" b="0" i="0">
-                <a:solidFill>
-                  <a:srgbClr val="E7F0F3"/>
-                </a:solidFill>
-                <a:latin typeface="Arial"/>
-              </a:rPr>
-              <a:t>p₀: maintained pressure</a:t>
-            </a:r>
-          </a:p>
-        </p:txBody>
-      </p:sp>
-      <p:cxnSp>
-        <p:nvCxnSpPr>
-          <p:cNvPr id="92" name="C4-E21 line 90" descr="sci-ppt:o090"/>
-          <p:cNvCxnSpPr/>
-          <p:nvPr/>
-        </p:nvCxnSpPr>
-        <p:spPr>
-          <a:xfrm>
-            <a:off x="4069080" y="3200400"/>
-            <a:ext cx="3063240" cy="0"/>
-          </a:xfrm>
-          <a:prstGeom prst="line">
-            <a:avLst/>
-          </a:prstGeom>
-          <a:ln w="25400">
-            <a:solidFill>
-              <a:srgbClr val="8EDBD4"/>
-            </a:solidFill>
-          </a:ln>
-          <a:effectLst/>
-        </p:spPr>
-      </p:cxnSp>
-      <p:sp>
-        <p:nvSpPr>
-          <p:cNvPr id="93" name="C4-E21 text 91" descr="sci-ppt:o091"/>
-          <p:cNvSpPr txBox="1"/>
-          <p:nvPr/>
-        </p:nvSpPr>
-        <p:spPr>
-          <a:xfrm>
-            <a:off x="5486400" y="3246120"/>
-            <a:ext cx="914400" cy="274320"/>
-          </a:xfrm>
-          <a:prstGeom prst="rect">
-            <a:avLst/>
-          </a:prstGeom>
-          <a:noFill/>
-          <a:effectLst/>
-        </p:spPr>
-        <p:txBody>
-          <a:bodyPr wrap="square" lIns="27432" rIns="27432" tIns="18288" bIns="18288" anchor="ctr">
-            <a:spAutoFit/>
-          </a:bodyPr>
-          <a:lstStyle/>
-          <a:p>
-            <a:pPr algn="l">
-              <a:spcAft>
-                <a:spcPts val="0"/>
-              </a:spcAft>
-            </a:pPr>
-            <a:r>
-              <a:rPr sz="1600" b="0" i="0">
-                <a:solidFill>
-                  <a:srgbClr val="E7F0F3"/>
-                </a:solidFill>
-                <a:latin typeface="Arial"/>
-              </a:rPr>
-              <a:t>b</a:t>
-            </a:r>
-          </a:p>
-        </p:txBody>
-      </p:sp>
-      <p:sp>
-        <p:nvSpPr>
-          <p:cNvPr id="94" name="C4-E21 ellipse 92" descr="sci-ppt:o092"/>
-          <p:cNvSpPr/>
-          <p:nvPr/>
-        </p:nvSpPr>
-        <p:spPr>
-          <a:xfrm>
-            <a:off x="8686800" y="1097280"/>
-            <a:ext cx="1920240" cy="1920240"/>
-          </a:xfrm>
-          <a:prstGeom prst="ellipse">
-            <a:avLst/>
-          </a:prstGeom>
-          <a:noFill/>
-          <a:ln w="19050">
-            <a:solidFill>
-              <a:srgbClr val="B4C7D2"/>
-            </a:solidFill>
-          </a:ln>
-          <a:effectLst/>
-        </p:spPr>
-        <p:txBody>
-          <a:bodyPr rtlCol="0" anchor="ctr"/>
-          <a:lstStyle/>
-          <a:p>
-            <a:pPr algn="ctr"/>
-          </a:p>
-        </p:txBody>
-      </p:sp>
-      <p:cxnSp>
-        <p:nvCxnSpPr>
-          <p:cNvPr id="95" name="C4-E21 arrow 93" descr="sci-ppt:o093"/>
-          <p:cNvCxnSpPr/>
-          <p:nvPr/>
-        </p:nvCxnSpPr>
-        <p:spPr>
-          <a:xfrm>
-            <a:off x="9646920" y="2057400"/>
-            <a:ext cx="960120" cy="0"/>
-          </a:xfrm>
-          <a:prstGeom prst="line">
-            <a:avLst/>
-          </a:prstGeom>
-          <a:ln w="25400">
-            <a:solidFill>
-              <a:srgbClr val="8EDBD4"/>
-            </a:solidFill>
-            <a:headEnd type="none" w="med" len="med"/>
-            <a:tailEnd type="triangle" w="med" len="med"/>
-          </a:ln>
-          <a:effectLst/>
-        </p:spPr>
-      </p:cxnSp>
-      <p:sp>
-        <p:nvSpPr>
-          <p:cNvPr id="96" name="C4-E21 text 94" descr="sci-ppt:o094"/>
-          <p:cNvSpPr txBox="1"/>
-          <p:nvPr/>
-        </p:nvSpPr>
-        <p:spPr>
-          <a:xfrm>
-            <a:off x="9875520" y="1645920"/>
-            <a:ext cx="914400" cy="274320"/>
-          </a:xfrm>
-          <a:prstGeom prst="rect">
-            <a:avLst/>
-          </a:prstGeom>
-          <a:noFill/>
-          <a:effectLst/>
-        </p:spPr>
-        <p:txBody>
-          <a:bodyPr wrap="square" lIns="27432" rIns="27432" tIns="18288" bIns="18288" anchor="ctr">
-            <a:spAutoFit/>
-          </a:bodyPr>
-          <a:lstStyle/>
-          <a:p>
-            <a:pPr algn="l">
-              <a:spcAft>
-                <a:spcPts val="0"/>
-              </a:spcAft>
-            </a:pPr>
-            <a:r>
-              <a:rPr sz="1700" b="0" i="0">
-                <a:solidFill>
-                  <a:srgbClr val="E7F0F3"/>
-                </a:solidFill>
-                <a:latin typeface="Arial"/>
-              </a:rPr>
-              <a:t>b</a:t>
-            </a:r>
-          </a:p>
-        </p:txBody>
-      </p:sp>
-      <p:sp>
-        <p:nvSpPr>
-          <p:cNvPr id="97" name="C4-E21 text 95" descr="sci-ppt:o095"/>
-          <p:cNvSpPr txBox="1"/>
-          <p:nvPr/>
-        </p:nvSpPr>
-        <p:spPr>
-          <a:xfrm>
-            <a:off x="8503920" y="3291840"/>
-            <a:ext cx="2743200" cy="365760"/>
-          </a:xfrm>
-          <a:prstGeom prst="rect">
-            <a:avLst/>
-          </a:prstGeom>
-          <a:noFill/>
-          <a:effectLst/>
-        </p:spPr>
-        <p:txBody>
-          <a:bodyPr wrap="square" lIns="27432" rIns="27432" tIns="18288" bIns="18288" anchor="ctr">
-            <a:spAutoFit/>
-          </a:bodyPr>
-          <a:lstStyle/>
-          <a:p>
-            <a:pPr algn="l">
-              <a:spcAft>
-                <a:spcPts val="0"/>
-              </a:spcAft>
-            </a:pPr>
-            <a:r>
-              <a:rPr sz="1800" b="0" i="0">
-                <a:solidFill>
-                  <a:srgbClr val="E7F0F3"/>
-                </a:solidFill>
-                <a:latin typeface="Arial"/>
-              </a:rPr>
-              <a:t>A_c = π b²</a:t>
-            </a:r>
-          </a:p>
-        </p:txBody>
-      </p:sp>
-      <p:sp>
-        <p:nvSpPr>
-          <p:cNvPr id="98" name="C4-E21 text 96" descr="sci-ppt:o096"/>
-          <p:cNvSpPr txBox="1"/>
-          <p:nvPr/>
-        </p:nvSpPr>
-        <p:spPr>
-          <a:xfrm>
-            <a:off x="685800" y="731520"/>
-            <a:ext cx="10972800" cy="365760"/>
-          </a:xfrm>
-          <a:prstGeom prst="rect">
-            <a:avLst/>
-          </a:prstGeom>
-          <a:noFill/>
-          <a:effectLst/>
-        </p:spPr>
-        <p:txBody>
-          <a:bodyPr wrap="square" lIns="27432" rIns="27432" tIns="18288" bIns="18288" anchor="ctr">
-            <a:spAutoFit/>
-          </a:bodyPr>
-          <a:lstStyle/>
-          <a:p>
-            <a:pPr algn="l">
-              <a:spcAft>
-                <a:spcPts val="0"/>
-              </a:spcAft>
-            </a:pPr>
-            <a:r>
-              <a:rPr sz="1800" b="0" i="0">
-                <a:solidFill>
-                  <a:srgbClr val="8EDBD4"/>
-                </a:solidFill>
-                <a:latin typeface="Arial"/>
-              </a:rPr>
-              <a:t>Clamped circular blister: w(b) = 0; w′(b) = 0; regular centre.</a:t>
-            </a:r>
-          </a:p>
-        </p:txBody>
-      </p:sp>
-      <p:cxnSp>
-        <p:nvCxnSpPr>
-          <p:cNvPr id="99" name="C4-E21 line 97" descr="sci-ppt:o097"/>
-          <p:cNvCxnSpPr/>
-          <p:nvPr/>
-        </p:nvCxnSpPr>
-        <p:spPr>
-          <a:xfrm>
-            <a:off x="274320" y="3977639"/>
-            <a:ext cx="11612880" cy="0"/>
-          </a:xfrm>
-          <a:prstGeom prst="line">
-            <a:avLst/>
-          </a:prstGeom>
-          <a:ln w="12700">
-            <a:solidFill>
-              <a:srgbClr val="405967"/>
-            </a:solidFill>
-          </a:ln>
-          <a:effectLst/>
-        </p:spPr>
-      </p:cxnSp>
-      <p:sp>
-        <p:nvSpPr>
-          <p:cNvPr id="100" name="C4-E21 text 98" descr="sci-ppt:o098"/>
-          <p:cNvSpPr txBox="1"/>
-          <p:nvPr/>
-        </p:nvSpPr>
-        <p:spPr>
-          <a:xfrm>
-            <a:off x="320040" y="4096512"/>
-            <a:ext cx="5715000" cy="246888"/>
-          </a:xfrm>
-          <a:prstGeom prst="rect">
-            <a:avLst/>
-          </a:prstGeom>
-          <a:noFill/>
-          <a:effectLst/>
-        </p:spPr>
-        <p:txBody>
-          <a:bodyPr wrap="square" lIns="27432" rIns="27432" tIns="18288" bIns="18288" anchor="ctr">
-            <a:spAutoFit/>
-          </a:bodyPr>
-          <a:lstStyle/>
-          <a:p>
-            <a:pPr algn="l">
-              <a:spcAft>
-                <a:spcPts val="0"/>
-              </a:spcAft>
-            </a:pPr>
-            <a:r>
-              <a:rPr sz="1150" b="0" i="0">
-                <a:solidFill>
-                  <a:srgbClr val="B4C7D2"/>
-                </a:solidFill>
-                <a:latin typeface="Arial"/>
-              </a:rPr>
-              <a:t>• p₀ → pressure loading</a:t>
-            </a:r>
-          </a:p>
-        </p:txBody>
-      </p:sp>
-      <p:sp>
-        <p:nvSpPr>
-          <p:cNvPr id="101" name="C4-E21 text 99" descr="sci-ppt:o099"/>
-          <p:cNvSpPr txBox="1"/>
-          <p:nvPr/>
-        </p:nvSpPr>
-        <p:spPr>
-          <a:xfrm>
-            <a:off x="6217920" y="4096512"/>
-            <a:ext cx="5715000" cy="246888"/>
-          </a:xfrm>
-          <a:prstGeom prst="rect">
-            <a:avLst/>
-          </a:prstGeom>
-          <a:noFill/>
-          <a:effectLst/>
-        </p:spPr>
-        <p:txBody>
-          <a:bodyPr wrap="square" lIns="27432" rIns="27432" tIns="18288" bIns="18288" anchor="ctr">
-            <a:spAutoFit/>
-          </a:bodyPr>
-          <a:lstStyle/>
-          <a:p>
-            <a:pPr algn="l">
-              <a:spcAft>
-                <a:spcPts val="0"/>
-              </a:spcAft>
-            </a:pPr>
-            <a:r>
-              <a:rPr sz="1150" b="0" i="0">
-                <a:solidFill>
-                  <a:srgbClr val="B4C7D2"/>
-                </a:solidFill>
-                <a:latin typeface="Arial"/>
-              </a:rPr>
-              <a:t>• p₀,crit → onset threshold</a:t>
-            </a:r>
-          </a:p>
-        </p:txBody>
-      </p:sp>
-      <p:sp>
-        <p:nvSpPr>
-          <p:cNvPr id="102" name="C4-E21 text 100" descr="sci-ppt:o100"/>
-          <p:cNvSpPr txBox="1"/>
-          <p:nvPr/>
-        </p:nvSpPr>
-        <p:spPr>
-          <a:xfrm>
-            <a:off x="320040" y="4329684"/>
-            <a:ext cx="5715000" cy="246888"/>
-          </a:xfrm>
-          <a:prstGeom prst="rect">
-            <a:avLst/>
-          </a:prstGeom>
-          <a:noFill/>
-          <a:effectLst/>
-        </p:spPr>
-        <p:txBody>
-          <a:bodyPr wrap="square" lIns="27432" rIns="27432" tIns="18288" bIns="18288" anchor="ctr">
-            <a:spAutoFit/>
-          </a:bodyPr>
-          <a:lstStyle/>
-          <a:p>
-            <a:pPr algn="l">
-              <a:spcAft>
-                <a:spcPts val="0"/>
-              </a:spcAft>
-            </a:pPr>
-            <a:r>
-              <a:rPr sz="1150" b="0" i="0">
-                <a:solidFill>
-                  <a:srgbClr val="B4C7D2"/>
-                </a:solidFill>
-                <a:latin typeface="Arial"/>
-              </a:rPr>
-              <a:t>• D_f, Γ → stiffness and fracture resistance</a:t>
-            </a:r>
-          </a:p>
-        </p:txBody>
-      </p:sp>
-      <p:sp>
-        <p:nvSpPr>
-          <p:cNvPr id="103" name="C4-E21 text 101" descr="sci-ppt:o101"/>
-          <p:cNvSpPr txBox="1"/>
-          <p:nvPr/>
-        </p:nvSpPr>
-        <p:spPr>
-          <a:xfrm>
-            <a:off x="6217920" y="4329684"/>
-            <a:ext cx="5715000" cy="246888"/>
-          </a:xfrm>
-          <a:prstGeom prst="rect">
-            <a:avLst/>
-          </a:prstGeom>
-          <a:noFill/>
-          <a:effectLst/>
-        </p:spPr>
-        <p:txBody>
-          <a:bodyPr wrap="square" lIns="27432" rIns="27432" tIns="18288" bIns="18288" anchor="ctr">
-            <a:spAutoFit/>
-          </a:bodyPr>
-          <a:lstStyle/>
-          <a:p>
-            <a:pPr algn="l">
-              <a:spcAft>
-                <a:spcPts val="0"/>
-              </a:spcAft>
-            </a:pPr>
-            <a:r>
-              <a:rPr sz="1150" b="0" i="0">
-                <a:solidFill>
-                  <a:srgbClr val="B4C7D2"/>
-                </a:solidFill>
-                <a:latin typeface="Arial"/>
-              </a:rPr>
-              <a:t>• b → pre-existing crack size</a:t>
-            </a:r>
-          </a:p>
-        </p:txBody>
-      </p:sp>
-      <p:sp>
-        <p:nvSpPr>
-          <p:cNvPr id="104" name="C4-E21 text 102" descr="sci-ppt:o102"/>
-          <p:cNvSpPr txBox="1"/>
-          <p:nvPr/>
-        </p:nvSpPr>
-        <p:spPr>
-          <a:xfrm>
-            <a:off x="320040" y="4562856"/>
-            <a:ext cx="5715000" cy="246888"/>
-          </a:xfrm>
-          <a:prstGeom prst="rect">
-            <a:avLst/>
-          </a:prstGeom>
-          <a:noFill/>
-          <a:effectLst/>
-        </p:spPr>
-        <p:txBody>
-          <a:bodyPr wrap="square" lIns="27432" rIns="27432" tIns="18288" bIns="18288" anchor="ctr">
-            <a:spAutoFit/>
-          </a:bodyPr>
-          <a:lstStyle/>
-          <a:p>
-            <a:pPr algn="l">
-              <a:spcAft>
-                <a:spcPts val="0"/>
-              </a:spcAft>
-            </a:pPr>
-            <a:r>
-              <a:rPr sz="1150" b="0" i="0">
-                <a:solidFill>
-                  <a:srgbClr val="B4C7D2"/>
-                </a:solidFill>
-                <a:latin typeface="Arial"/>
-              </a:rPr>
-              <a:t>• G_p₀/Γ → propagation screen</a:t>
-            </a:r>
-          </a:p>
-        </p:txBody>
-      </p:sp>
-      <p:sp>
-        <p:nvSpPr>
-          <p:cNvPr id="105" name="C4-E21 text 103" descr="sci-ppt:o103"/>
-          <p:cNvSpPr txBox="1"/>
-          <p:nvPr/>
-        </p:nvSpPr>
-        <p:spPr>
-          <a:xfrm>
-            <a:off x="320040" y="5596128"/>
-            <a:ext cx="11430000" cy="292608"/>
-          </a:xfrm>
-          <a:prstGeom prst="rect">
-            <a:avLst/>
-          </a:prstGeom>
-          <a:noFill/>
-          <a:effectLst/>
-        </p:spPr>
-        <p:txBody>
-          <a:bodyPr wrap="square" lIns="27432" rIns="27432" tIns="18288" bIns="18288" anchor="ctr">
-            <a:spAutoFit/>
-          </a:bodyPr>
-          <a:lstStyle/>
-          <a:p>
-            <a:pPr algn="l">
-              <a:spcAft>
-                <a:spcPts val="0"/>
-              </a:spcAft>
-            </a:pPr>
-            <a:r>
-              <a:rPr sz="1150" b="0" i="0">
-                <a:solidFill>
-                  <a:srgbClr val="8EDBD4"/>
-                </a:solidFill>
-                <a:latin typeface="Arial"/>
-              </a:rPr>
-              <a:t>Larger existing delamination lowers critical pressure.</a:t>
-            </a:r>
-          </a:p>
-        </p:txBody>
-      </p:sp>
-      <p:sp>
-        <p:nvSpPr>
-          <p:cNvPr id="106" name="C4-E21 text 104" descr="sci-ppt:o104"/>
-          <p:cNvSpPr txBox="1"/>
-          <p:nvPr/>
-        </p:nvSpPr>
-        <p:spPr>
-          <a:xfrm>
-            <a:off x="320040" y="6473952"/>
-            <a:ext cx="11430000" cy="256032"/>
-          </a:xfrm>
-          <a:prstGeom prst="rect">
-            <a:avLst/>
-          </a:prstGeom>
-          <a:noFill/>
-          <a:effectLst/>
-        </p:spPr>
-        <p:txBody>
-          <a:bodyPr wrap="square" lIns="27432" rIns="27432" tIns="18288" bIns="18288" anchor="ctr">
+          <a:bodyPr wrap="none" lIns="18288" rIns="18288" tIns="18288" bIns="18288" anchor="t">
             <a:spAutoFit/>
           </a:bodyPr>
           <a:lstStyle/>
@@ -5691,7 +4905,7 @@
                 </a:solidFill>
                 <a:latin typeface="Arial"/>
               </a:rPr>
-              <a:t>Model schematic; geometry is not to scale.</a:t>
+              <a:t>Onset threshold of Eq. C4-E21.</a:t>
             </a:r>
           </a:p>
         </p:txBody>
